--- a/P2/Dissemination/P2_Presentation.pptx
+++ b/P2/Dissemination/P2_Presentation.pptx
@@ -10,7 +10,7 @@
   <p:sldIdLst>
     <p:sldId id="256" r:id="rId2"/>
     <p:sldId id="264" r:id="rId3"/>
-    <p:sldId id="259" r:id="rId4"/>
+    <p:sldId id="268" r:id="rId4"/>
     <p:sldId id="265" r:id="rId5"/>
     <p:sldId id="261" r:id="rId6"/>
     <p:sldId id="266" r:id="rId7"/>
@@ -124,7 +124,7 @@
 <file path=ppt/revisionInfo.xml><?xml version="1.0" encoding="utf-8"?>
 <p1510:revInfo xmlns:a="http://schemas.openxmlformats.org/drawingml/2006/main" xmlns:r="http://schemas.openxmlformats.org/officeDocument/2006/relationships" xmlns:p1510="http://schemas.microsoft.com/office/powerpoint/2015/10/main">
   <p1510:revLst>
-    <p1510:client id="{09F18E4A-5CA4-4CE0-A947-255959ACAAE8}" v="161" dt="2026-03-30T05:30:12.012"/>
+    <p1510:client id="{30C90CA0-1127-4F50-8FD8-9723BDB6A9C7}" v="170" dt="2026-03-30T15:24:56.206"/>
   </p1510:revLst>
 </p1510:revInfo>
 </file>
@@ -133,364 +133,26 @@
 <pc:chgInfo xmlns:a="http://schemas.openxmlformats.org/drawingml/2006/main" xmlns:r="http://schemas.openxmlformats.org/officeDocument/2006/relationships" xmlns:ac="http://schemas.microsoft.com/office/drawing/2013/main/command" xmlns:pc="http://schemas.microsoft.com/office/powerpoint/2013/main/command">
   <pc:docChgLst>
     <pc:chgData name="Ezra Weible" userId="67bcaf2f89c4552e" providerId="LiveId" clId="{E4E19776-AA89-4579-B0CB-50FEF10C4E93}"/>
-    <pc:docChg chg="undo custSel addSld delSld modSld sldOrd">
-      <pc:chgData name="Ezra Weible" userId="67bcaf2f89c4552e" providerId="LiveId" clId="{E4E19776-AA89-4579-B0CB-50FEF10C4E93}" dt="2026-03-30T05:31:38.865" v="2527" actId="20577"/>
+    <pc:docChg chg="undo custSel addSld delSld modSld">
+      <pc:chgData name="Ezra Weible" userId="67bcaf2f89c4552e" providerId="LiveId" clId="{E4E19776-AA89-4579-B0CB-50FEF10C4E93}" dt="2026-03-30T15:13:51.918" v="815" actId="20577"/>
       <pc:docMkLst>
         <pc:docMk/>
       </pc:docMkLst>
-      <pc:sldChg chg="modSp mod">
-        <pc:chgData name="Ezra Weible" userId="67bcaf2f89c4552e" providerId="LiveId" clId="{E4E19776-AA89-4579-B0CB-50FEF10C4E93}" dt="2026-03-30T04:57:40.415" v="12" actId="20577"/>
+      <pc:sldChg chg="del">
+        <pc:chgData name="Ezra Weible" userId="67bcaf2f89c4552e" providerId="LiveId" clId="{E4E19776-AA89-4579-B0CB-50FEF10C4E93}" dt="2026-03-30T15:00:19.810" v="1" actId="47"/>
         <pc:sldMkLst>
           <pc:docMk/>
-          <pc:sldMk cId="172457528" sldId="256"/>
+          <pc:sldMk cId="0" sldId="259"/>
         </pc:sldMkLst>
-        <pc:spChg chg="mod">
-          <ac:chgData name="Ezra Weible" userId="67bcaf2f89c4552e" providerId="LiveId" clId="{E4E19776-AA89-4579-B0CB-50FEF10C4E93}" dt="2026-03-30T04:57:40.415" v="12" actId="20577"/>
-          <ac:spMkLst>
-            <pc:docMk/>
-            <pc:sldMk cId="172457528" sldId="256"/>
-            <ac:spMk id="2" creationId="{22BA05CB-D135-24A4-70E2-C769C9D4E398}"/>
-          </ac:spMkLst>
-        </pc:spChg>
-        <pc:spChg chg="mod">
-          <ac:chgData name="Ezra Weible" userId="67bcaf2f89c4552e" providerId="LiveId" clId="{E4E19776-AA89-4579-B0CB-50FEF10C4E93}" dt="2026-03-30T04:57:26.624" v="10" actId="20577"/>
-          <ac:spMkLst>
-            <pc:docMk/>
-            <pc:sldMk cId="172457528" sldId="256"/>
-            <ac:spMk id="3" creationId="{738EDFCD-1365-0B50-E2C7-26389D8331A7}"/>
-          </ac:spMkLst>
-        </pc:spChg>
       </pc:sldChg>
-      <pc:sldChg chg="delSp modSp del mod">
-        <pc:chgData name="Ezra Weible" userId="67bcaf2f89c4552e" providerId="LiveId" clId="{E4E19776-AA89-4579-B0CB-50FEF10C4E93}" dt="2026-03-30T05:03:39.165" v="80" actId="47"/>
-        <pc:sldMkLst>
-          <pc:docMk/>
-          <pc:sldMk cId="3886421937" sldId="258"/>
-        </pc:sldMkLst>
-        <pc:spChg chg="mod">
-          <ac:chgData name="Ezra Weible" userId="67bcaf2f89c4552e" providerId="LiveId" clId="{E4E19776-AA89-4579-B0CB-50FEF10C4E93}" dt="2026-03-30T05:03:36.416" v="78" actId="21"/>
-          <ac:spMkLst>
-            <pc:docMk/>
-            <pc:sldMk cId="3886421937" sldId="258"/>
-            <ac:spMk id="2" creationId="{2388FA23-D7FB-336E-27D3-D22A653A0920}"/>
-          </ac:spMkLst>
-        </pc:spChg>
-        <pc:spChg chg="mod">
-          <ac:chgData name="Ezra Weible" userId="67bcaf2f89c4552e" providerId="LiveId" clId="{E4E19776-AA89-4579-B0CB-50FEF10C4E93}" dt="2026-03-30T05:03:30.827" v="76" actId="1076"/>
-          <ac:spMkLst>
-            <pc:docMk/>
-            <pc:sldMk cId="3886421937" sldId="258"/>
-            <ac:spMk id="3" creationId="{3DDEC1C9-F0BB-944E-104A-1C46C5D25AF4}"/>
-          </ac:spMkLst>
-        </pc:spChg>
-        <pc:picChg chg="del">
-          <ac:chgData name="Ezra Weible" userId="67bcaf2f89c4552e" providerId="LiveId" clId="{E4E19776-AA89-4579-B0CB-50FEF10C4E93}" dt="2026-03-30T05:03:26.515" v="75" actId="478"/>
-          <ac:picMkLst>
-            <pc:docMk/>
-            <pc:sldMk cId="3886421937" sldId="258"/>
-            <ac:picMk id="6" creationId="{72A2132F-682C-7649-E642-D8CF72185C60}"/>
-          </ac:picMkLst>
-        </pc:picChg>
-      </pc:sldChg>
-      <pc:sldChg chg="addSp delSp modSp mod ord modNotesTx">
-        <pc:chgData name="Ezra Weible" userId="67bcaf2f89c4552e" providerId="LiveId" clId="{E4E19776-AA89-4579-B0CB-50FEF10C4E93}" dt="2026-03-30T05:16:14.975" v="1097" actId="20577"/>
-        <pc:sldMkLst>
-          <pc:docMk/>
-          <pc:sldMk cId="387199353" sldId="259"/>
-        </pc:sldMkLst>
-        <pc:spChg chg="mod">
-          <ac:chgData name="Ezra Weible" userId="67bcaf2f89c4552e" providerId="LiveId" clId="{E4E19776-AA89-4579-B0CB-50FEF10C4E93}" dt="2026-03-30T05:06:23.795" v="492" actId="20577"/>
-          <ac:spMkLst>
-            <pc:docMk/>
-            <pc:sldMk cId="387199353" sldId="259"/>
-            <ac:spMk id="2" creationId="{518015DF-3CD4-329A-4010-2682136C7949}"/>
-          </ac:spMkLst>
-        </pc:spChg>
-        <pc:spChg chg="del">
-          <ac:chgData name="Ezra Weible" userId="67bcaf2f89c4552e" providerId="LiveId" clId="{E4E19776-AA89-4579-B0CB-50FEF10C4E93}" dt="2026-03-30T05:06:57.194" v="493" actId="478"/>
-          <ac:spMkLst>
-            <pc:docMk/>
-            <pc:sldMk cId="387199353" sldId="259"/>
-            <ac:spMk id="3" creationId="{C8E021CD-AE97-EDA5-E14F-25C0B1E7C85E}"/>
-          </ac:spMkLst>
-        </pc:spChg>
-        <pc:spChg chg="add mod">
-          <ac:chgData name="Ezra Weible" userId="67bcaf2f89c4552e" providerId="LiveId" clId="{E4E19776-AA89-4579-B0CB-50FEF10C4E93}" dt="2026-03-30T05:15:06.746" v="1004" actId="1076"/>
-          <ac:spMkLst>
-            <pc:docMk/>
-            <pc:sldMk cId="387199353" sldId="259"/>
-            <ac:spMk id="5" creationId="{7DEB2388-59F8-42F4-0DAD-CDC49B3969F6}"/>
-          </ac:spMkLst>
-        </pc:spChg>
-        <pc:spChg chg="add del">
-          <ac:chgData name="Ezra Weible" userId="67bcaf2f89c4552e" providerId="LiveId" clId="{E4E19776-AA89-4579-B0CB-50FEF10C4E93}" dt="2026-03-30T05:06:58.225" v="495" actId="22"/>
-          <ac:spMkLst>
-            <pc:docMk/>
-            <pc:sldMk cId="387199353" sldId="259"/>
-            <ac:spMk id="7" creationId="{6756E464-F881-21D9-6668-C97CAF14C2E2}"/>
-          </ac:spMkLst>
-        </pc:spChg>
-        <pc:spChg chg="add mod">
-          <ac:chgData name="Ezra Weible" userId="67bcaf2f89c4552e" providerId="LiveId" clId="{E4E19776-AA89-4579-B0CB-50FEF10C4E93}" dt="2026-03-30T05:10:16.455" v="599" actId="767"/>
-          <ac:spMkLst>
-            <pc:docMk/>
-            <pc:sldMk cId="387199353" sldId="259"/>
-            <ac:spMk id="8" creationId="{D791572C-ACA2-7450-74CF-4AF67AA652CA}"/>
-          </ac:spMkLst>
-        </pc:spChg>
-        <pc:spChg chg="add del mod">
-          <ac:chgData name="Ezra Weible" userId="67bcaf2f89c4552e" providerId="LiveId" clId="{E4E19776-AA89-4579-B0CB-50FEF10C4E93}" dt="2026-03-30T05:11:24.945" v="624"/>
-          <ac:spMkLst>
-            <pc:docMk/>
-            <pc:sldMk cId="387199353" sldId="259"/>
-            <ac:spMk id="9" creationId="{EAB72254-0FCD-9CBA-A5CD-B9B534CCD2BE}"/>
-          </ac:spMkLst>
-        </pc:spChg>
-        <pc:spChg chg="add del">
-          <ac:chgData name="Ezra Weible" userId="67bcaf2f89c4552e" providerId="LiveId" clId="{E4E19776-AA89-4579-B0CB-50FEF10C4E93}" dt="2026-03-30T05:10:58.967" v="612" actId="22"/>
-          <ac:spMkLst>
-            <pc:docMk/>
-            <pc:sldMk cId="387199353" sldId="259"/>
-            <ac:spMk id="11" creationId="{B73AC73D-184C-1276-8C5C-F121D491DD5C}"/>
-          </ac:spMkLst>
-        </pc:spChg>
-        <pc:spChg chg="add mod">
-          <ac:chgData name="Ezra Weible" userId="67bcaf2f89c4552e" providerId="LiveId" clId="{E4E19776-AA89-4579-B0CB-50FEF10C4E93}" dt="2026-03-30T05:15:09.665" v="1005" actId="1076"/>
-          <ac:spMkLst>
-            <pc:docMk/>
-            <pc:sldMk cId="387199353" sldId="259"/>
-            <ac:spMk id="12" creationId="{C7FB2D84-EFBF-6B49-4764-34644694BC48}"/>
-          </ac:spMkLst>
-        </pc:spChg>
-        <pc:spChg chg="add del">
-          <ac:chgData name="Ezra Weible" userId="67bcaf2f89c4552e" providerId="LiveId" clId="{E4E19776-AA89-4579-B0CB-50FEF10C4E93}" dt="2026-03-30T05:13:46.789" v="864" actId="22"/>
-          <ac:spMkLst>
-            <pc:docMk/>
-            <pc:sldMk cId="387199353" sldId="259"/>
-            <ac:spMk id="14" creationId="{D884751E-F7F3-64FF-EB73-2A0E4CCDFB64}"/>
-          </ac:spMkLst>
-        </pc:spChg>
-        <pc:spChg chg="add mod">
-          <ac:chgData name="Ezra Weible" userId="67bcaf2f89c4552e" providerId="LiveId" clId="{E4E19776-AA89-4579-B0CB-50FEF10C4E93}" dt="2026-03-30T05:15:55.011" v="1096" actId="20577"/>
-          <ac:spMkLst>
-            <pc:docMk/>
-            <pc:sldMk cId="387199353" sldId="259"/>
-            <ac:spMk id="16" creationId="{8F15DD56-E0FF-A28F-198B-39C6256AA827}"/>
-          </ac:spMkLst>
-        </pc:spChg>
-      </pc:sldChg>
-      <pc:sldChg chg="addSp delSp modSp del mod">
-        <pc:chgData name="Ezra Weible" userId="67bcaf2f89c4552e" providerId="LiveId" clId="{E4E19776-AA89-4579-B0CB-50FEF10C4E93}" dt="2026-03-30T05:16:38.147" v="1109" actId="47"/>
-        <pc:sldMkLst>
-          <pc:docMk/>
-          <pc:sldMk cId="3662945949" sldId="260"/>
-        </pc:sldMkLst>
-        <pc:spChg chg="del mod">
-          <ac:chgData name="Ezra Weible" userId="67bcaf2f89c4552e" providerId="LiveId" clId="{E4E19776-AA89-4579-B0CB-50FEF10C4E93}" dt="2026-03-30T05:16:34.235" v="1107" actId="478"/>
-          <ac:spMkLst>
-            <pc:docMk/>
-            <pc:sldMk cId="3662945949" sldId="260"/>
-            <ac:spMk id="2" creationId="{B2944C85-5A76-96FD-50F8-486CF4A0FFFA}"/>
-          </ac:spMkLst>
-        </pc:spChg>
-        <pc:spChg chg="add mod">
-          <ac:chgData name="Ezra Weible" userId="67bcaf2f89c4552e" providerId="LiveId" clId="{E4E19776-AA89-4579-B0CB-50FEF10C4E93}" dt="2026-03-30T05:16:34.235" v="1107" actId="478"/>
-          <ac:spMkLst>
-            <pc:docMk/>
-            <pc:sldMk cId="3662945949" sldId="260"/>
-            <ac:spMk id="4" creationId="{4DE8C170-8B98-BE94-A57E-7F5A30661700}"/>
-          </ac:spMkLst>
-        </pc:spChg>
-        <pc:spChg chg="del mod">
-          <ac:chgData name="Ezra Weible" userId="67bcaf2f89c4552e" providerId="LiveId" clId="{E4E19776-AA89-4579-B0CB-50FEF10C4E93}" dt="2026-03-30T05:16:27.575" v="1102" actId="478"/>
-          <ac:spMkLst>
-            <pc:docMk/>
-            <pc:sldMk cId="3662945949" sldId="260"/>
-            <ac:spMk id="8" creationId="{2678A103-B34A-7245-70D3-19061D09F596}"/>
-          </ac:spMkLst>
-        </pc:spChg>
-        <pc:spChg chg="del mod">
-          <ac:chgData name="Ezra Weible" userId="67bcaf2f89c4552e" providerId="LiveId" clId="{E4E19776-AA89-4579-B0CB-50FEF10C4E93}" dt="2026-03-30T05:16:30.895" v="1105" actId="478"/>
-          <ac:spMkLst>
-            <pc:docMk/>
-            <pc:sldMk cId="3662945949" sldId="260"/>
-            <ac:spMk id="10" creationId="{278B4911-AAF2-73BA-87E9-8638E6A10DB3}"/>
-          </ac:spMkLst>
-        </pc:spChg>
-        <pc:spChg chg="del">
-          <ac:chgData name="Ezra Weible" userId="67bcaf2f89c4552e" providerId="LiveId" clId="{E4E19776-AA89-4579-B0CB-50FEF10C4E93}" dt="2026-03-30T05:16:26.305" v="1100" actId="478"/>
-          <ac:spMkLst>
-            <pc:docMk/>
-            <pc:sldMk cId="3662945949" sldId="260"/>
-            <ac:spMk id="20" creationId="{EAB8A822-D31F-B0D8-A93B-8FA4DA1E44A5}"/>
-          </ac:spMkLst>
-        </pc:spChg>
-        <pc:spChg chg="del">
-          <ac:chgData name="Ezra Weible" userId="67bcaf2f89c4552e" providerId="LiveId" clId="{E4E19776-AA89-4579-B0CB-50FEF10C4E93}" dt="2026-03-30T05:16:32.899" v="1106" actId="478"/>
-          <ac:spMkLst>
-            <pc:docMk/>
-            <pc:sldMk cId="3662945949" sldId="260"/>
-            <ac:spMk id="21" creationId="{CCA07D77-2269-D274-738F-B2444736DC13}"/>
-          </ac:spMkLst>
-        </pc:spChg>
-        <pc:picChg chg="del">
-          <ac:chgData name="Ezra Weible" userId="67bcaf2f89c4552e" providerId="LiveId" clId="{E4E19776-AA89-4579-B0CB-50FEF10C4E93}" dt="2026-03-30T05:16:24.555" v="1098" actId="478"/>
-          <ac:picMkLst>
-            <pc:docMk/>
-            <pc:sldMk cId="3662945949" sldId="260"/>
-            <ac:picMk id="5" creationId="{CBF2EA4A-770B-A007-C32D-C113EF253623}"/>
-          </ac:picMkLst>
-        </pc:picChg>
-        <pc:picChg chg="del">
-          <ac:chgData name="Ezra Weible" userId="67bcaf2f89c4552e" providerId="LiveId" clId="{E4E19776-AA89-4579-B0CB-50FEF10C4E93}" dt="2026-03-30T05:16:25.495" v="1099" actId="478"/>
-          <ac:picMkLst>
-            <pc:docMk/>
-            <pc:sldMk cId="3662945949" sldId="260"/>
-            <ac:picMk id="7" creationId="{D9494F59-A2CB-EC87-AA9B-041040610F76}"/>
-          </ac:picMkLst>
-        </pc:picChg>
-        <pc:cxnChg chg="del">
-          <ac:chgData name="Ezra Weible" userId="67bcaf2f89c4552e" providerId="LiveId" clId="{E4E19776-AA89-4579-B0CB-50FEF10C4E93}" dt="2026-03-30T05:16:29.677" v="1103" actId="478"/>
-          <ac:cxnSpMkLst>
-            <pc:docMk/>
-            <pc:sldMk cId="3662945949" sldId="260"/>
-            <ac:cxnSpMk id="14" creationId="{FDFA17A8-8C28-A290-AA5A-52FF2677DB26}"/>
-          </ac:cxnSpMkLst>
-        </pc:cxnChg>
-      </pc:sldChg>
-      <pc:sldChg chg="addSp delSp modSp mod delAnim modNotesTx">
-        <pc:chgData name="Ezra Weible" userId="67bcaf2f89c4552e" providerId="LiveId" clId="{E4E19776-AA89-4579-B0CB-50FEF10C4E93}" dt="2026-03-30T05:22:50.495" v="1603" actId="1076"/>
-        <pc:sldMkLst>
-          <pc:docMk/>
-          <pc:sldMk cId="3421660498" sldId="261"/>
-        </pc:sldMkLst>
-        <pc:spChg chg="mod">
-          <ac:chgData name="Ezra Weible" userId="67bcaf2f89c4552e" providerId="LiveId" clId="{E4E19776-AA89-4579-B0CB-50FEF10C4E93}" dt="2026-03-30T05:18:59.751" v="1377" actId="20577"/>
-          <ac:spMkLst>
-            <pc:docMk/>
-            <pc:sldMk cId="3421660498" sldId="261"/>
-            <ac:spMk id="2" creationId="{AF467FC7-B7BC-970E-1FA6-9034E8AF46F6}"/>
-          </ac:spMkLst>
-        </pc:spChg>
-        <pc:spChg chg="mod">
-          <ac:chgData name="Ezra Weible" userId="67bcaf2f89c4552e" providerId="LiveId" clId="{E4E19776-AA89-4579-B0CB-50FEF10C4E93}" dt="2026-03-30T05:22:50.495" v="1603" actId="1076"/>
-          <ac:spMkLst>
-            <pc:docMk/>
-            <pc:sldMk cId="3421660498" sldId="261"/>
-            <ac:spMk id="8" creationId="{E0B6ED8A-E67E-B8F5-16BB-5BF975943A7A}"/>
-          </ac:spMkLst>
-        </pc:spChg>
-        <pc:picChg chg="del">
-          <ac:chgData name="Ezra Weible" userId="67bcaf2f89c4552e" providerId="LiveId" clId="{E4E19776-AA89-4579-B0CB-50FEF10C4E93}" dt="2026-03-30T05:18:43.835" v="1368" actId="478"/>
-          <ac:picMkLst>
-            <pc:docMk/>
-            <pc:sldMk cId="3421660498" sldId="261"/>
-            <ac:picMk id="4" creationId="{3BC8F1A8-A1F2-83A3-E59A-EC8BBC07D73B}"/>
-          </ac:picMkLst>
-        </pc:picChg>
-        <pc:picChg chg="add mod ord modCrop">
-          <ac:chgData name="Ezra Weible" userId="67bcaf2f89c4552e" providerId="LiveId" clId="{E4E19776-AA89-4579-B0CB-50FEF10C4E93}" dt="2026-03-30T05:22:31.903" v="1597" actId="167"/>
-          <ac:picMkLst>
-            <pc:docMk/>
-            <pc:sldMk cId="3421660498" sldId="261"/>
-            <ac:picMk id="5" creationId="{D76482A7-91E5-F49F-360C-FD7B1E49AFE0}"/>
-          </ac:picMkLst>
-        </pc:picChg>
-        <pc:picChg chg="del">
-          <ac:chgData name="Ezra Weible" userId="67bcaf2f89c4552e" providerId="LiveId" clId="{E4E19776-AA89-4579-B0CB-50FEF10C4E93}" dt="2026-03-30T05:18:42.555" v="1367" actId="478"/>
-          <ac:picMkLst>
-            <pc:docMk/>
-            <pc:sldMk cId="3421660498" sldId="261"/>
-            <ac:picMk id="9" creationId="{00FB87A4-003E-9585-3627-597978215511}"/>
-          </ac:picMkLst>
-        </pc:picChg>
-      </pc:sldChg>
-      <pc:sldChg chg="addSp delSp modSp del mod">
-        <pc:chgData name="Ezra Weible" userId="67bcaf2f89c4552e" providerId="LiveId" clId="{E4E19776-AA89-4579-B0CB-50FEF10C4E93}" dt="2026-03-30T05:21:28.909" v="1566" actId="47"/>
-        <pc:sldMkLst>
-          <pc:docMk/>
-          <pc:sldMk cId="4241141346" sldId="262"/>
-        </pc:sldMkLst>
-        <pc:spChg chg="mod">
-          <ac:chgData name="Ezra Weible" userId="67bcaf2f89c4552e" providerId="LiveId" clId="{E4E19776-AA89-4579-B0CB-50FEF10C4E93}" dt="2026-03-30T04:58:48.884" v="50" actId="20577"/>
-          <ac:spMkLst>
-            <pc:docMk/>
-            <pc:sldMk cId="4241141346" sldId="262"/>
-            <ac:spMk id="2" creationId="{797F2C28-C500-6BBE-8421-48D477758A8A}"/>
-          </ac:spMkLst>
-        </pc:spChg>
-        <pc:spChg chg="add mod">
-          <ac:chgData name="Ezra Weible" userId="67bcaf2f89c4552e" providerId="LiveId" clId="{E4E19776-AA89-4579-B0CB-50FEF10C4E93}" dt="2026-03-30T05:21:22.615" v="1564" actId="478"/>
-          <ac:spMkLst>
-            <pc:docMk/>
-            <pc:sldMk cId="4241141346" sldId="262"/>
-            <ac:spMk id="6" creationId="{33A8CC2C-A80C-76A8-7B4A-44AA7A36F8CD}"/>
-          </ac:spMkLst>
-        </pc:spChg>
-        <pc:picChg chg="del">
-          <ac:chgData name="Ezra Weible" userId="67bcaf2f89c4552e" providerId="LiveId" clId="{E4E19776-AA89-4579-B0CB-50FEF10C4E93}" dt="2026-03-30T05:21:22.615" v="1564" actId="478"/>
-          <ac:picMkLst>
-            <pc:docMk/>
-            <pc:sldMk cId="4241141346" sldId="262"/>
-            <ac:picMk id="5" creationId="{7480106B-FE1D-378C-C5EC-5F80146DBA28}"/>
-          </ac:picMkLst>
-        </pc:picChg>
-      </pc:sldChg>
-      <pc:sldChg chg="addSp delSp modSp del mod">
-        <pc:chgData name="Ezra Weible" userId="67bcaf2f89c4552e" providerId="LiveId" clId="{E4E19776-AA89-4579-B0CB-50FEF10C4E93}" dt="2026-03-30T05:28:08.533" v="1881" actId="2696"/>
-        <pc:sldMkLst>
-          <pc:docMk/>
-          <pc:sldMk cId="526477587" sldId="263"/>
-        </pc:sldMkLst>
-        <pc:spChg chg="mod">
-          <ac:chgData name="Ezra Weible" userId="67bcaf2f89c4552e" providerId="LiveId" clId="{E4E19776-AA89-4579-B0CB-50FEF10C4E93}" dt="2026-03-30T05:28:03.636" v="1880" actId="20577"/>
-          <ac:spMkLst>
-            <pc:docMk/>
-            <pc:sldMk cId="526477587" sldId="263"/>
-            <ac:spMk id="2" creationId="{918BB890-9475-61F8-E4FD-539EB1225540}"/>
-          </ac:spMkLst>
-        </pc:spChg>
-        <pc:spChg chg="del">
-          <ac:chgData name="Ezra Weible" userId="67bcaf2f89c4552e" providerId="LiveId" clId="{E4E19776-AA89-4579-B0CB-50FEF10C4E93}" dt="2026-03-30T05:22:00.856" v="1590" actId="478"/>
-          <ac:spMkLst>
-            <pc:docMk/>
-            <pc:sldMk cId="526477587" sldId="263"/>
-            <ac:spMk id="3" creationId="{A45962E8-9B6F-3E4F-36EA-FA81667F1DC1}"/>
-          </ac:spMkLst>
-        </pc:spChg>
-        <pc:spChg chg="add del mod">
-          <ac:chgData name="Ezra Weible" userId="67bcaf2f89c4552e" providerId="LiveId" clId="{E4E19776-AA89-4579-B0CB-50FEF10C4E93}" dt="2026-03-30T05:22:03.065" v="1592" actId="478"/>
-          <ac:spMkLst>
-            <pc:docMk/>
-            <pc:sldMk cId="526477587" sldId="263"/>
-            <ac:spMk id="5" creationId="{0144EE1C-FE34-1CA4-DD49-079CDBE9FC5A}"/>
-          </ac:spMkLst>
-        </pc:spChg>
-        <pc:picChg chg="add del mod">
-          <ac:chgData name="Ezra Weible" userId="67bcaf2f89c4552e" providerId="LiveId" clId="{E4E19776-AA89-4579-B0CB-50FEF10C4E93}" dt="2026-03-30T05:24:03.732" v="1612" actId="21"/>
-          <ac:picMkLst>
-            <pc:docMk/>
-            <pc:sldMk cId="526477587" sldId="263"/>
-            <ac:picMk id="7" creationId="{5954DB85-F8F9-31F6-50E8-0F253B2B3DF1}"/>
-          </ac:picMkLst>
-        </pc:picChg>
-      </pc:sldChg>
-      <pc:sldChg chg="modSp new mod">
-        <pc:chgData name="Ezra Weible" userId="67bcaf2f89c4552e" providerId="LiveId" clId="{E4E19776-AA89-4579-B0CB-50FEF10C4E93}" dt="2026-03-30T05:13:42.715" v="862" actId="20577"/>
+      <pc:sldChg chg="modSp mod">
+        <pc:chgData name="Ezra Weible" userId="67bcaf2f89c4552e" providerId="LiveId" clId="{E4E19776-AA89-4579-B0CB-50FEF10C4E93}" dt="2026-03-30T15:12:38.830" v="747" actId="313"/>
         <pc:sldMkLst>
           <pc:docMk/>
           <pc:sldMk cId="2031114758" sldId="264"/>
         </pc:sldMkLst>
         <pc:spChg chg="mod">
-          <ac:chgData name="Ezra Weible" userId="67bcaf2f89c4552e" providerId="LiveId" clId="{E4E19776-AA89-4579-B0CB-50FEF10C4E93}" dt="2026-03-30T05:03:37.755" v="79"/>
-          <ac:spMkLst>
-            <pc:docMk/>
-            <pc:sldMk cId="2031114758" sldId="264"/>
-            <ac:spMk id="2" creationId="{888CE440-A711-DA0A-F27C-3824202A30A0}"/>
-          </ac:spMkLst>
-        </pc:spChg>
-        <pc:spChg chg="mod">
-          <ac:chgData name="Ezra Weible" userId="67bcaf2f89c4552e" providerId="LiveId" clId="{E4E19776-AA89-4579-B0CB-50FEF10C4E93}" dt="2026-03-30T05:13:42.715" v="862" actId="20577"/>
+          <ac:chgData name="Ezra Weible" userId="67bcaf2f89c4552e" providerId="LiveId" clId="{E4E19776-AA89-4579-B0CB-50FEF10C4E93}" dt="2026-03-30T15:12:38.830" v="747" actId="313"/>
           <ac:spMkLst>
             <pc:docMk/>
             <pc:sldMk cId="2031114758" sldId="264"/>
@@ -498,144 +160,42 @@
           </ac:spMkLst>
         </pc:spChg>
       </pc:sldChg>
-      <pc:sldChg chg="addSp delSp modSp new mod">
-        <pc:chgData name="Ezra Weible" userId="67bcaf2f89c4552e" providerId="LiveId" clId="{E4E19776-AA89-4579-B0CB-50FEF10C4E93}" dt="2026-03-30T05:18:32.237" v="1366" actId="6549"/>
+      <pc:sldChg chg="addSp modSp new mod">
+        <pc:chgData name="Ezra Weible" userId="67bcaf2f89c4552e" providerId="LiveId" clId="{E4E19776-AA89-4579-B0CB-50FEF10C4E93}" dt="2026-03-30T15:13:51.918" v="815" actId="20577"/>
         <pc:sldMkLst>
           <pc:docMk/>
-          <pc:sldMk cId="497020878" sldId="265"/>
+          <pc:sldMk cId="888993954" sldId="268"/>
         </pc:sldMkLst>
-        <pc:spChg chg="mod ord">
-          <ac:chgData name="Ezra Weible" userId="67bcaf2f89c4552e" providerId="LiveId" clId="{E4E19776-AA89-4579-B0CB-50FEF10C4E93}" dt="2026-03-30T05:17:12.605" v="1131" actId="166"/>
+        <pc:spChg chg="mod">
+          <ac:chgData name="Ezra Weible" userId="67bcaf2f89c4552e" providerId="LiveId" clId="{E4E19776-AA89-4579-B0CB-50FEF10C4E93}" dt="2026-03-30T15:00:31.461" v="21" actId="20577"/>
           <ac:spMkLst>
             <pc:docMk/>
-            <pc:sldMk cId="497020878" sldId="265"/>
-            <ac:spMk id="2" creationId="{1E113C99-82F6-999D-CD04-7AED19063F26}"/>
+            <pc:sldMk cId="888993954" sldId="268"/>
+            <ac:spMk id="2" creationId="{BBFE902E-0D67-2CB6-914E-B00F14B31A47}"/>
           </ac:spMkLst>
         </pc:spChg>
-        <pc:spChg chg="del">
-          <ac:chgData name="Ezra Weible" userId="67bcaf2f89c4552e" providerId="LiveId" clId="{E4E19776-AA89-4579-B0CB-50FEF10C4E93}" dt="2026-03-30T05:16:55.585" v="1126" actId="931"/>
+        <pc:spChg chg="mod">
+          <ac:chgData name="Ezra Weible" userId="67bcaf2f89c4552e" providerId="LiveId" clId="{E4E19776-AA89-4579-B0CB-50FEF10C4E93}" dt="2026-03-30T15:08:02.473" v="376" actId="12"/>
           <ac:spMkLst>
             <pc:docMk/>
-            <pc:sldMk cId="497020878" sldId="265"/>
-            <ac:spMk id="3" creationId="{5BA19018-FCB7-A0BE-E091-83F0755EBB70}"/>
+            <pc:sldMk cId="888993954" sldId="268"/>
+            <ac:spMk id="3" creationId="{7CDF675F-404B-0F09-70EB-F798CE3CEC55}"/>
           </ac:spMkLst>
         </pc:spChg>
         <pc:spChg chg="add mod">
-          <ac:chgData name="Ezra Weible" userId="67bcaf2f89c4552e" providerId="LiveId" clId="{E4E19776-AA89-4579-B0CB-50FEF10C4E93}" dt="2026-03-30T05:18:32.237" v="1366" actId="6549"/>
+          <ac:chgData name="Ezra Weible" userId="67bcaf2f89c4552e" providerId="LiveId" clId="{E4E19776-AA89-4579-B0CB-50FEF10C4E93}" dt="2026-03-30T15:08:37.976" v="391" actId="20577"/>
           <ac:spMkLst>
             <pc:docMk/>
-            <pc:sldMk cId="497020878" sldId="265"/>
-            <ac:spMk id="6" creationId="{092DCA6E-B1D1-CC94-CA30-C185F85D16EA}"/>
-          </ac:spMkLst>
-        </pc:spChg>
-        <pc:picChg chg="add mod ord">
-          <ac:chgData name="Ezra Weible" userId="67bcaf2f89c4552e" providerId="LiveId" clId="{E4E19776-AA89-4579-B0CB-50FEF10C4E93}" dt="2026-03-30T05:17:05.866" v="1129" actId="1076"/>
-          <ac:picMkLst>
-            <pc:docMk/>
-            <pc:sldMk cId="497020878" sldId="265"/>
-            <ac:picMk id="5" creationId="{D8106DB9-A5FD-9D50-3401-AACA45343A54}"/>
-          </ac:picMkLst>
-        </pc:picChg>
-      </pc:sldChg>
-      <pc:sldChg chg="addSp delSp modSp add mod">
-        <pc:chgData name="Ezra Weible" userId="67bcaf2f89c4552e" providerId="LiveId" clId="{E4E19776-AA89-4579-B0CB-50FEF10C4E93}" dt="2026-03-30T05:27:52.813" v="1870" actId="404"/>
-        <pc:sldMkLst>
-          <pc:docMk/>
-          <pc:sldMk cId="2372827335" sldId="266"/>
-        </pc:sldMkLst>
-        <pc:spChg chg="mod">
-          <ac:chgData name="Ezra Weible" userId="67bcaf2f89c4552e" providerId="LiveId" clId="{E4E19776-AA89-4579-B0CB-50FEF10C4E93}" dt="2026-03-30T05:21:32.302" v="1568" actId="20577"/>
-          <ac:spMkLst>
-            <pc:docMk/>
-            <pc:sldMk cId="2372827335" sldId="266"/>
-            <ac:spMk id="2" creationId="{9FFDA582-4EDA-CAD7-0235-E4DAE2F1BA33}"/>
-          </ac:spMkLst>
-        </pc:spChg>
-        <pc:spChg chg="add del mod">
-          <ac:chgData name="Ezra Weible" userId="67bcaf2f89c4552e" providerId="LiveId" clId="{E4E19776-AA89-4579-B0CB-50FEF10C4E93}" dt="2026-03-30T05:21:36.545" v="1570" actId="478"/>
-          <ac:spMkLst>
-            <pc:docMk/>
-            <pc:sldMk cId="2372827335" sldId="266"/>
-            <ac:spMk id="4" creationId="{11E29A3F-7DDE-F1BD-037D-230BFCE10DF5}"/>
-          </ac:spMkLst>
-        </pc:spChg>
-        <pc:spChg chg="del">
-          <ac:chgData name="Ezra Weible" userId="67bcaf2f89c4552e" providerId="LiveId" clId="{E4E19776-AA89-4579-B0CB-50FEF10C4E93}" dt="2026-03-30T05:21:34.731" v="1569" actId="478"/>
-          <ac:spMkLst>
-            <pc:docMk/>
-            <pc:sldMk cId="2372827335" sldId="266"/>
-            <ac:spMk id="8" creationId="{91EFB890-4D01-D15D-0935-56709F775B8A}"/>
-          </ac:spMkLst>
-        </pc:spChg>
-        <pc:spChg chg="add del mod">
-          <ac:chgData name="Ezra Weible" userId="67bcaf2f89c4552e" providerId="LiveId" clId="{E4E19776-AA89-4579-B0CB-50FEF10C4E93}" dt="2026-03-30T05:24:12.025" v="1616" actId="478"/>
-          <ac:spMkLst>
-            <pc:docMk/>
-            <pc:sldMk cId="2372827335" sldId="266"/>
-            <ac:spMk id="11" creationId="{424450B4-7261-0478-D7E3-5DB746A39B22}"/>
+            <pc:sldMk cId="888993954" sldId="268"/>
+            <ac:spMk id="4" creationId="{1AC1B729-0183-05D0-28CD-089B160F76B1}"/>
           </ac:spMkLst>
         </pc:spChg>
         <pc:spChg chg="add mod">
-          <ac:chgData name="Ezra Weible" userId="67bcaf2f89c4552e" providerId="LiveId" clId="{E4E19776-AA89-4579-B0CB-50FEF10C4E93}" dt="2026-03-30T05:27:52.813" v="1870" actId="404"/>
+          <ac:chgData name="Ezra Weible" userId="67bcaf2f89c4552e" providerId="LiveId" clId="{E4E19776-AA89-4579-B0CB-50FEF10C4E93}" dt="2026-03-30T15:13:51.918" v="815" actId="20577"/>
           <ac:spMkLst>
             <pc:docMk/>
-            <pc:sldMk cId="2372827335" sldId="266"/>
-            <ac:spMk id="13" creationId="{9942B377-B46E-09E1-6419-DD3A3D6964B2}"/>
-          </ac:spMkLst>
-        </pc:spChg>
-        <pc:picChg chg="del mod">
-          <ac:chgData name="Ezra Weible" userId="67bcaf2f89c4552e" providerId="LiveId" clId="{E4E19776-AA89-4579-B0CB-50FEF10C4E93}" dt="2026-03-30T05:21:37.037" v="1572" actId="478"/>
-          <ac:picMkLst>
-            <pc:docMk/>
-            <pc:sldMk cId="2372827335" sldId="266"/>
-            <ac:picMk id="5" creationId="{C12E9B44-D15E-C3E8-7E39-E8910C89911C}"/>
-          </ac:picMkLst>
-        </pc:picChg>
-        <pc:picChg chg="add del mod">
-          <ac:chgData name="Ezra Weible" userId="67bcaf2f89c4552e" providerId="LiveId" clId="{E4E19776-AA89-4579-B0CB-50FEF10C4E93}" dt="2026-03-30T05:21:50.990" v="1576" actId="21"/>
-          <ac:picMkLst>
-            <pc:docMk/>
-            <pc:sldMk cId="2372827335" sldId="266"/>
-            <ac:picMk id="7" creationId="{5954DB85-F8F9-31F6-50E8-0F253B2B3DF1}"/>
-          </ac:picMkLst>
-        </pc:picChg>
-        <pc:picChg chg="add mod modCrop">
-          <ac:chgData name="Ezra Weible" userId="67bcaf2f89c4552e" providerId="LiveId" clId="{E4E19776-AA89-4579-B0CB-50FEF10C4E93}" dt="2026-03-30T05:27:07.821" v="1854" actId="14100"/>
-          <ac:picMkLst>
-            <pc:docMk/>
-            <pc:sldMk cId="2372827335" sldId="266"/>
-            <ac:picMk id="10" creationId="{15515D96-C826-5E85-2960-E79192D77576}"/>
-          </ac:picMkLst>
-        </pc:picChg>
-        <pc:picChg chg="add mod">
-          <ac:chgData name="Ezra Weible" userId="67bcaf2f89c4552e" providerId="LiveId" clId="{E4E19776-AA89-4579-B0CB-50FEF10C4E93}" dt="2026-03-30T05:27:17.285" v="1856" actId="1076"/>
-          <ac:picMkLst>
-            <pc:docMk/>
-            <pc:sldMk cId="2372827335" sldId="266"/>
-            <ac:picMk id="12" creationId="{5954DB85-F8F9-31F6-50E8-0F253B2B3DF1}"/>
-          </ac:picMkLst>
-        </pc:picChg>
-      </pc:sldChg>
-      <pc:sldChg chg="modSp new mod">
-        <pc:chgData name="Ezra Weible" userId="67bcaf2f89c4552e" providerId="LiveId" clId="{E4E19776-AA89-4579-B0CB-50FEF10C4E93}" dt="2026-03-30T05:31:38.865" v="2527" actId="20577"/>
-        <pc:sldMkLst>
-          <pc:docMk/>
-          <pc:sldMk cId="3098210706" sldId="267"/>
-        </pc:sldMkLst>
-        <pc:spChg chg="mod">
-          <ac:chgData name="Ezra Weible" userId="67bcaf2f89c4552e" providerId="LiveId" clId="{E4E19776-AA89-4579-B0CB-50FEF10C4E93}" dt="2026-03-30T05:28:12.646" v="1892" actId="20577"/>
-          <ac:spMkLst>
-            <pc:docMk/>
-            <pc:sldMk cId="3098210706" sldId="267"/>
-            <ac:spMk id="2" creationId="{CD2956CC-2C13-4965-99B4-D56696CDF062}"/>
-          </ac:spMkLst>
-        </pc:spChg>
-        <pc:spChg chg="mod">
-          <ac:chgData name="Ezra Weible" userId="67bcaf2f89c4552e" providerId="LiveId" clId="{E4E19776-AA89-4579-B0CB-50FEF10C4E93}" dt="2026-03-30T05:31:38.865" v="2527" actId="20577"/>
-          <ac:spMkLst>
-            <pc:docMk/>
-            <pc:sldMk cId="3098210706" sldId="267"/>
-            <ac:spMk id="3" creationId="{481B33D7-794F-1509-4B5F-030772F08C29}"/>
+            <pc:sldMk cId="888993954" sldId="268"/>
+            <ac:spMk id="5" creationId="{C9C8DACF-29B2-06A6-F49C-071FE633DEAE}"/>
           </ac:spMkLst>
         </pc:spChg>
       </pc:sldChg>
@@ -726,7 +286,7 @@
           <a:p>
             <a:fld id="{03A0EFA4-960B-4904-885A-CF0C95618E09}" type="datetimeFigureOut">
               <a:rPr lang="en-US" smtClean="0"/>
-              <a:t>3/29/2026</a:t>
+              <a:t>3/30/2026</a:t>
             </a:fld>
             <a:endParaRPr lang="en-US"/>
           </a:p>
@@ -1121,108 +681,6 @@
           <a:bodyPr/>
           <a:lstStyle/>
           <a:p>
-            <a:pPr marL="171450" lvl="0" indent="-171450">
-              <a:buFontTx/>
-              <a:buChar char="-"/>
-            </a:pPr>
-            <a:endParaRPr lang="en-US" dirty="0"/>
-          </a:p>
-          <a:p>
-            <a:pPr marL="628650" lvl="1" indent="-171450">
-              <a:buFontTx/>
-              <a:buChar char="-"/>
-            </a:pPr>
-            <a:endParaRPr lang="en-US" dirty="0"/>
-          </a:p>
-          <a:p>
-            <a:pPr marL="0" indent="0">
-              <a:buFontTx/>
-              <a:buNone/>
-            </a:pPr>
-            <a:endParaRPr lang="en-US" dirty="0"/>
-          </a:p>
-        </p:txBody>
-      </p:sp>
-      <p:sp>
-        <p:nvSpPr>
-          <p:cNvPr id="4" name="Slide Number Placeholder 3"/>
-          <p:cNvSpPr>
-            <a:spLocks noGrp="1"/>
-          </p:cNvSpPr>
-          <p:nvPr>
-            <p:ph type="sldNum" sz="quarter" idx="5"/>
-          </p:nvPr>
-        </p:nvSpPr>
-        <p:spPr/>
-        <p:txBody>
-          <a:bodyPr/>
-          <a:lstStyle/>
-          <a:p>
-            <a:fld id="{B18332F0-876C-42EC-A93C-C92102BDEA90}" type="slidenum">
-              <a:rPr lang="en-US" smtClean="0"/>
-              <a:t>3</a:t>
-            </a:fld>
-            <a:endParaRPr lang="en-US"/>
-          </a:p>
-        </p:txBody>
-      </p:sp>
-    </p:spTree>
-    <p:extLst>
-      <p:ext uri="{BB962C8B-B14F-4D97-AF65-F5344CB8AC3E}">
-        <p14:creationId xmlns:p14="http://schemas.microsoft.com/office/powerpoint/2010/main" val="2627599936"/>
-      </p:ext>
-    </p:extLst>
-  </p:cSld>
-  <p:clrMapOvr>
-    <a:masterClrMapping/>
-  </p:clrMapOvr>
-</p:notes>
-</file>
-
-<file path=ppt/notesSlides/notesSlide3.xml><?xml version="1.0" encoding="utf-8"?>
-<p:notes xmlns:a="http://schemas.openxmlformats.org/drawingml/2006/main" xmlns:r="http://schemas.openxmlformats.org/officeDocument/2006/relationships" xmlns:p="http://schemas.openxmlformats.org/presentationml/2006/main">
-  <p:cSld>
-    <p:spTree>
-      <p:nvGrpSpPr>
-        <p:cNvPr id="1" name=""/>
-        <p:cNvGrpSpPr/>
-        <p:nvPr/>
-      </p:nvGrpSpPr>
-      <p:grpSpPr>
-        <a:xfrm>
-          <a:off x="0" y="0"/>
-          <a:ext cx="0" cy="0"/>
-          <a:chOff x="0" y="0"/>
-          <a:chExt cx="0" cy="0"/>
-        </a:xfrm>
-      </p:grpSpPr>
-      <p:sp>
-        <p:nvSpPr>
-          <p:cNvPr id="2" name="Slide Image Placeholder 1"/>
-          <p:cNvSpPr>
-            <a:spLocks noGrp="1" noRot="1" noChangeAspect="1"/>
-          </p:cNvSpPr>
-          <p:nvPr>
-            <p:ph type="sldImg"/>
-          </p:nvPr>
-        </p:nvSpPr>
-        <p:spPr/>
-      </p:sp>
-      <p:sp>
-        <p:nvSpPr>
-          <p:cNvPr id="3" name="Notes Placeholder 2"/>
-          <p:cNvSpPr>
-            <a:spLocks noGrp="1"/>
-          </p:cNvSpPr>
-          <p:nvPr>
-            <p:ph type="body" idx="1"/>
-          </p:nvPr>
-        </p:nvSpPr>
-        <p:spPr/>
-        <p:txBody>
-          <a:bodyPr/>
-          <a:lstStyle/>
-          <a:p>
             <a:pPr marL="171450" indent="-171450">
               <a:buFontTx/>
               <a:buChar char="-"/>
@@ -1267,7 +725,7 @@
 </p:notes>
 </file>
 
-<file path=ppt/notesSlides/notesSlide4.xml><?xml version="1.0" encoding="utf-8"?>
+<file path=ppt/notesSlides/notesSlide3.xml><?xml version="1.0" encoding="utf-8"?>
 <p:notes xmlns:a="http://schemas.openxmlformats.org/drawingml/2006/main" xmlns:r="http://schemas.openxmlformats.org/officeDocument/2006/relationships" xmlns:p="http://schemas.openxmlformats.org/presentationml/2006/main">
   <p:cSld>
     <p:spTree>
@@ -1333,7 +791,10 @@
               <a:buFontTx/>
               <a:buChar char="-"/>
             </a:pPr>
-            <a:endParaRPr lang="en-US" dirty="0"/>
+            <a:r>
+              <a:rPr lang="en-US" dirty="0"/>
+              <a:t>Power to detect differences in marker-outcome correlations between amyloid+ and amyloid- groups across interaction sizes, amyloid prevalence ratios, and $\alpha$ levels. Lines show the power achieved for a given amyloid+ correlation, with separate panels for each interaction size (difference in correlations) and each amyloid+:amyloid- group ratio (30/70, 40/60, 50/50, 60/40). Power was calculated using two-sample correlation difference tests with N = 175 and adjusted Type I error thresholds ($\alpha$ = 0.05/4, 0.05/6, 0.05/24). The dashed horizontal line marks 80% power. Larger interaction effects and more balanced group ratios yield higher power, while stricter $\alpha$ thresholds require stronger underlying correlations in the amyloid+ group to achieve comparable power. Some differences in correlations never reach 80% power for any measured amyloid+ correlation.</a:t>
+            </a:r>
           </a:p>
         </p:txBody>
       </p:sp>
@@ -1526,7 +987,7 @@
           <a:p>
             <a:fld id="{81C4AEBB-EB7F-487C-A8ED-8DBAC0E887FE}" type="datetimeFigureOut">
               <a:rPr lang="en-US" smtClean="0"/>
-              <a:t>3/29/2026</a:t>
+              <a:t>3/30/2026</a:t>
             </a:fld>
             <a:endParaRPr lang="en-US"/>
           </a:p>
@@ -1724,7 +1185,7 @@
           <a:p>
             <a:fld id="{81C4AEBB-EB7F-487C-A8ED-8DBAC0E887FE}" type="datetimeFigureOut">
               <a:rPr lang="en-US" smtClean="0"/>
-              <a:t>3/29/2026</a:t>
+              <a:t>3/30/2026</a:t>
             </a:fld>
             <a:endParaRPr lang="en-US"/>
           </a:p>
@@ -1932,7 +1393,7 @@
           <a:p>
             <a:fld id="{81C4AEBB-EB7F-487C-A8ED-8DBAC0E887FE}" type="datetimeFigureOut">
               <a:rPr lang="en-US" smtClean="0"/>
-              <a:t>3/29/2026</a:t>
+              <a:t>3/30/2026</a:t>
             </a:fld>
             <a:endParaRPr lang="en-US"/>
           </a:p>
@@ -2130,7 +1591,7 @@
           <a:p>
             <a:fld id="{81C4AEBB-EB7F-487C-A8ED-8DBAC0E887FE}" type="datetimeFigureOut">
               <a:rPr lang="en-US" smtClean="0"/>
-              <a:t>3/29/2026</a:t>
+              <a:t>3/30/2026</a:t>
             </a:fld>
             <a:endParaRPr lang="en-US"/>
           </a:p>
@@ -2405,7 +1866,7 @@
           <a:p>
             <a:fld id="{81C4AEBB-EB7F-487C-A8ED-8DBAC0E887FE}" type="datetimeFigureOut">
               <a:rPr lang="en-US" smtClean="0"/>
-              <a:t>3/29/2026</a:t>
+              <a:t>3/30/2026</a:t>
             </a:fld>
             <a:endParaRPr lang="en-US"/>
           </a:p>
@@ -2670,7 +2131,7 @@
           <a:p>
             <a:fld id="{81C4AEBB-EB7F-487C-A8ED-8DBAC0E887FE}" type="datetimeFigureOut">
               <a:rPr lang="en-US" smtClean="0"/>
-              <a:t>3/29/2026</a:t>
+              <a:t>3/30/2026</a:t>
             </a:fld>
             <a:endParaRPr lang="en-US"/>
           </a:p>
@@ -3082,7 +2543,7 @@
           <a:p>
             <a:fld id="{81C4AEBB-EB7F-487C-A8ED-8DBAC0E887FE}" type="datetimeFigureOut">
               <a:rPr lang="en-US" smtClean="0"/>
-              <a:t>3/29/2026</a:t>
+              <a:t>3/30/2026</a:t>
             </a:fld>
             <a:endParaRPr lang="en-US"/>
           </a:p>
@@ -3223,7 +2684,7 @@
           <a:p>
             <a:fld id="{81C4AEBB-EB7F-487C-A8ED-8DBAC0E887FE}" type="datetimeFigureOut">
               <a:rPr lang="en-US" smtClean="0"/>
-              <a:t>3/29/2026</a:t>
+              <a:t>3/30/2026</a:t>
             </a:fld>
             <a:endParaRPr lang="en-US"/>
           </a:p>
@@ -3336,7 +2797,7 @@
           <a:p>
             <a:fld id="{81C4AEBB-EB7F-487C-A8ED-8DBAC0E887FE}" type="datetimeFigureOut">
               <a:rPr lang="en-US" smtClean="0"/>
-              <a:t>3/29/2026</a:t>
+              <a:t>3/30/2026</a:t>
             </a:fld>
             <a:endParaRPr lang="en-US"/>
           </a:p>
@@ -3647,7 +3108,7 @@
           <a:p>
             <a:fld id="{81C4AEBB-EB7F-487C-A8ED-8DBAC0E887FE}" type="datetimeFigureOut">
               <a:rPr lang="en-US" smtClean="0"/>
-              <a:t>3/29/2026</a:t>
+              <a:t>3/30/2026</a:t>
             </a:fld>
             <a:endParaRPr lang="en-US"/>
           </a:p>
@@ -3935,7 +3396,7 @@
           <a:p>
             <a:fld id="{81C4AEBB-EB7F-487C-A8ED-8DBAC0E887FE}" type="datetimeFigureOut">
               <a:rPr lang="en-US" smtClean="0"/>
-              <a:t>3/29/2026</a:t>
+              <a:t>3/30/2026</a:t>
             </a:fld>
             <a:endParaRPr lang="en-US"/>
           </a:p>
@@ -4176,7 +3637,7 @@
           <a:p>
             <a:fld id="{81C4AEBB-EB7F-487C-A8ED-8DBAC0E887FE}" type="datetimeFigureOut">
               <a:rPr lang="en-US" smtClean="0"/>
-              <a:t>3/29/2026</a:t>
+              <a:t>3/30/2026</a:t>
             </a:fld>
             <a:endParaRPr lang="en-US"/>
           </a:p>
@@ -4761,7 +4222,7 @@
             </a:r>
             <a:r>
               <a:rPr lang="en-US" dirty="0"/>
-              <a:t>, MCP-1, Eotaxin-1) associated with 1 year changes in memory and cortical thickness?</a:t>
+              <a:t>, MCP-1, Eotaxin-1) associated with 1 year changes in episodic memory and cortical thickness?</a:t>
             </a:r>
           </a:p>
           <a:p>
@@ -4839,7 +4300,7 @@
           <p:cNvPr id="2" name="Title 1">
             <a:extLst>
               <a:ext uri="{FF2B5EF4-FFF2-40B4-BE49-F238E27FC236}">
-                <a16:creationId xmlns:a16="http://schemas.microsoft.com/office/drawing/2014/main" id="{518015DF-3CD4-329A-4010-2682136C7949}"/>
+                <a16:creationId xmlns:a16="http://schemas.microsoft.com/office/drawing/2014/main" id="{BBFE902E-0D67-2CB6-914E-B00F14B31A47}"/>
               </a:ext>
             </a:extLst>
           </p:cNvPr>
@@ -4857,7 +4318,7 @@
           <a:p>
             <a:r>
               <a:rPr lang="en-US" dirty="0"/>
-              <a:t>Analysis Plan</a:t>
+              <a:t>Data Analysis Plan</a:t>
             </a:r>
           </a:p>
         </p:txBody>
@@ -4866,10 +4327,10 @@
         <mc:Choice xmlns:a14="http://schemas.microsoft.com/office/drawing/2010/main" Requires="a14">
           <p:sp>
             <p:nvSpPr>
-              <p:cNvPr id="5" name="Content Placeholder 4">
+              <p:cNvPr id="3" name="Content Placeholder 2">
                 <a:extLst>
                   <a:ext uri="{FF2B5EF4-FFF2-40B4-BE49-F238E27FC236}">
-                    <a16:creationId xmlns:a16="http://schemas.microsoft.com/office/drawing/2014/main" id="{7DEB2388-59F8-42F4-0DAD-CDC49B3969F6}"/>
+                    <a16:creationId xmlns:a16="http://schemas.microsoft.com/office/drawing/2014/main" id="{7CDF675F-404B-0F09-70EB-F798CE3CEC55}"/>
                   </a:ext>
                 </a:extLst>
               </p:cNvPr>
@@ -4883,13 +4344,11 @@
             <p:spPr>
               <a:xfrm>
                 <a:off x="838200" y="1690688"/>
-                <a:ext cx="5084064" cy="2392807"/>
+                <a:ext cx="4038600" cy="4351338"/>
               </a:xfrm>
             </p:spPr>
             <p:txBody>
-              <a:bodyPr>
-                <a:normAutofit/>
-              </a:bodyPr>
+              <a:bodyPr/>
               <a:lstStyle/>
               <a:p>
                 <a:pPr marL="0" indent="0">
@@ -4897,14 +4356,14 @@
                 </a:pPr>
                 <a:r>
                   <a:rPr lang="en-US" dirty="0"/>
-                  <a:t>Aim 1 (</a:t>
+                  <a:t>Aim 1: </a:t>
                 </a:r>
                 <a14:m>
                   <m:oMath xmlns:m="http://schemas.openxmlformats.org/officeDocument/2006/math">
                     <m:sSub>
                       <m:sSubPr>
                         <m:ctrlPr>
-                          <a:rPr lang="en-US" i="1">
+                          <a:rPr lang="en-US" i="1" smtClean="0">
                             <a:latin typeface="Cambria Math" panose="02040503050406030204" pitchFamily="18" charset="0"/>
                           </a:rPr>
                         </m:ctrlPr>
@@ -4920,7 +4379,7 @@
                       </m:e>
                       <m:sub>
                         <m:r>
-                          <a:rPr lang="en-US" i="1">
+                          <a:rPr lang="en-US" b="0" i="1" smtClean="0">
                             <a:latin typeface="Cambria Math" panose="02040503050406030204" pitchFamily="18" charset="0"/>
                           </a:rPr>
                           <m:t>1</m:t>
@@ -4928,350 +4387,351 @@
                       </m:sub>
                     </m:sSub>
                     <m:r>
-                      <a:rPr lang="en-US" i="1">
+                      <a:rPr lang="en-US" i="1" smtClean="0">
                         <a:latin typeface="Cambria Math" panose="02040503050406030204" pitchFamily="18" charset="0"/>
                         <a:ea typeface="Cambria Math" panose="02040503050406030204" pitchFamily="18" charset="0"/>
                       </a:rPr>
-                      <m:t>≠0</m:t>
+                      <m:t>≠</m:t>
+                    </m:r>
+                    <m:r>
+                      <a:rPr lang="en-US" b="0" i="1" smtClean="0">
+                        <a:latin typeface="Cambria Math" panose="02040503050406030204" pitchFamily="18" charset="0"/>
+                        <a:ea typeface="Cambria Math" panose="02040503050406030204" pitchFamily="18" charset="0"/>
+                      </a:rPr>
+                      <m:t>0</m:t>
                     </m:r>
                   </m:oMath>
                 </a14:m>
-                <a:r>
-                  <a:rPr lang="en-US" dirty="0"/>
-                  <a:t>)</a:t>
-                </a:r>
-                <a:endParaRPr lang="en-US" dirty="0">
-                  <a:latin typeface="Cambria Math" panose="02040503050406030204" pitchFamily="18" charset="0"/>
-                </a:endParaRPr>
+                <a:endParaRPr lang="en-US" dirty="0"/>
               </a:p>
               <a:p>
-                <a:pPr marL="0" indent="0">
-                  <a:buNone/>
-                </a:pPr>
                 <a14:m>
-                  <m:oMathPara xmlns:m="http://schemas.openxmlformats.org/officeDocument/2006/math">
-                    <m:oMathParaPr>
-                      <m:jc m:val="centerGroup"/>
-                    </m:oMathParaPr>
-                    <m:oMath xmlns:m="http://schemas.openxmlformats.org/officeDocument/2006/math">
-                      <m:r>
-                        <a:rPr lang="en-US" i="1" smtClean="0">
-                          <a:latin typeface="Cambria Math" panose="02040503050406030204" pitchFamily="18" charset="0"/>
-                        </a:rPr>
-                        <m:t>𝑂𝑢𝑡𝑐𝑜𝑚</m:t>
-                      </m:r>
-                      <m:sSub>
-                        <m:sSubPr>
-                          <m:ctrlPr>
-                            <a:rPr lang="en-US" i="1" smtClean="0">
-                              <a:latin typeface="Cambria Math" panose="02040503050406030204" pitchFamily="18" charset="0"/>
-                            </a:rPr>
-                          </m:ctrlPr>
-                        </m:sSubPr>
-                        <m:e>
-                          <m:r>
-                            <a:rPr lang="en-US" i="1" smtClean="0">
-                              <a:latin typeface="Cambria Math" panose="02040503050406030204" pitchFamily="18" charset="0"/>
-                            </a:rPr>
-                            <m:t>𝑒</m:t>
-                          </m:r>
-                        </m:e>
-                        <m:sub>
-                          <m:r>
-                            <a:rPr lang="en-US" i="1" smtClean="0">
-                              <a:latin typeface="Cambria Math" panose="02040503050406030204" pitchFamily="18" charset="0"/>
-                            </a:rPr>
-                            <m:t>𝑌</m:t>
-                          </m:r>
-                          <m:r>
-                            <a:rPr lang="en-US" i="1" smtClean="0">
-                              <a:latin typeface="Cambria Math" panose="02040503050406030204" pitchFamily="18" charset="0"/>
-                            </a:rPr>
-                            <m:t>1−</m:t>
-                          </m:r>
-                          <m:r>
-                            <a:rPr lang="en-US" i="1" smtClean="0">
-                              <a:latin typeface="Cambria Math" panose="02040503050406030204" pitchFamily="18" charset="0"/>
-                            </a:rPr>
-                            <m:t>𝑌</m:t>
-                          </m:r>
-                          <m:r>
-                            <a:rPr lang="en-US" i="1" smtClean="0">
-                              <a:latin typeface="Cambria Math" panose="02040503050406030204" pitchFamily="18" charset="0"/>
-                            </a:rPr>
-                            <m:t>0</m:t>
-                          </m:r>
-                        </m:sub>
-                      </m:sSub>
-                      <m:r>
-                        <a:rPr lang="en-US" i="1" smtClean="0">
-                          <a:latin typeface="Cambria Math" panose="02040503050406030204" pitchFamily="18" charset="0"/>
-                        </a:rPr>
-                        <m:t>=</m:t>
-                      </m:r>
-                      <m:sSub>
-                        <m:sSubPr>
-                          <m:ctrlPr>
-                            <a:rPr lang="en-US" i="1" smtClean="0">
-                              <a:latin typeface="Cambria Math" panose="02040503050406030204" pitchFamily="18" charset="0"/>
-                            </a:rPr>
-                          </m:ctrlPr>
-                        </m:sSubPr>
-                        <m:e>
-                          <m:r>
-                            <a:rPr lang="en-US" i="1" smtClean="0">
-                              <a:latin typeface="Cambria Math" panose="02040503050406030204" pitchFamily="18" charset="0"/>
-                            </a:rPr>
-                            <m:t>𝛽</m:t>
-                          </m:r>
-                        </m:e>
-                        <m:sub>
-                          <m:r>
-                            <a:rPr lang="en-US" i="1" smtClean="0">
-                              <a:latin typeface="Cambria Math" panose="02040503050406030204" pitchFamily="18" charset="0"/>
-                            </a:rPr>
-                            <m:t>0</m:t>
-                          </m:r>
-                        </m:sub>
-                      </m:sSub>
-                      <m:r>
-                        <a:rPr lang="en-US" i="1" smtClean="0">
-                          <a:latin typeface="Cambria Math" panose="02040503050406030204" pitchFamily="18" charset="0"/>
-                        </a:rPr>
-                        <m:t>+</m:t>
-                      </m:r>
-                      <m:sSub>
-                        <m:sSubPr>
-                          <m:ctrlPr>
-                            <a:rPr lang="en-US" i="1" smtClean="0">
-                              <a:latin typeface="Cambria Math" panose="02040503050406030204" pitchFamily="18" charset="0"/>
-                            </a:rPr>
-                          </m:ctrlPr>
-                        </m:sSubPr>
-                        <m:e>
-                          <m:r>
-                            <a:rPr lang="en-US" i="1" smtClean="0">
-                              <a:latin typeface="Cambria Math" panose="02040503050406030204" pitchFamily="18" charset="0"/>
-                            </a:rPr>
-                            <m:t>𝛽</m:t>
-                          </m:r>
-                        </m:e>
-                        <m:sub>
-                          <m:r>
-                            <a:rPr lang="en-US" i="1" smtClean="0">
-                              <a:latin typeface="Cambria Math" panose="02040503050406030204" pitchFamily="18" charset="0"/>
-                            </a:rPr>
-                            <m:t>1</m:t>
-                          </m:r>
-                        </m:sub>
-                      </m:sSub>
-                      <m:r>
-                        <a:rPr lang="en-US" i="1" smtClean="0">
-                          <a:latin typeface="Cambria Math" panose="02040503050406030204" pitchFamily="18" charset="0"/>
-                        </a:rPr>
-                        <m:t>𝑀𝑎𝑟𝑘𝑒</m:t>
-                      </m:r>
-                      <m:sSub>
-                        <m:sSubPr>
-                          <m:ctrlPr>
-                            <a:rPr lang="en-US" i="1" smtClean="0">
-                              <a:latin typeface="Cambria Math" panose="02040503050406030204" pitchFamily="18" charset="0"/>
-                            </a:rPr>
-                          </m:ctrlPr>
-                        </m:sSubPr>
-                        <m:e>
-                          <m:r>
-                            <a:rPr lang="en-US" i="1" smtClean="0">
-                              <a:latin typeface="Cambria Math" panose="02040503050406030204" pitchFamily="18" charset="0"/>
-                            </a:rPr>
-                            <m:t>𝑟</m:t>
-                          </m:r>
-                        </m:e>
-                        <m:sub>
-                          <m:r>
-                            <a:rPr lang="en-US" i="1" smtClean="0">
-                              <a:latin typeface="Cambria Math" panose="02040503050406030204" pitchFamily="18" charset="0"/>
-                            </a:rPr>
-                            <m:t>𝑌</m:t>
-                          </m:r>
-                          <m:r>
-                            <a:rPr lang="en-US" i="1" smtClean="0">
-                              <a:latin typeface="Cambria Math" panose="02040503050406030204" pitchFamily="18" charset="0"/>
-                            </a:rPr>
-                            <m:t>1</m:t>
-                          </m:r>
-                          <m:r>
-                            <m:rPr>
-                              <m:nor/>
-                            </m:rPr>
-                            <a:rPr lang="en-US" i="0" smtClean="0">
-                              <a:latin typeface="Cambria Math" panose="02040503050406030204" pitchFamily="18" charset="0"/>
-                            </a:rPr>
-                            <m:t> </m:t>
-                          </m:r>
-                          <m:r>
-                            <m:rPr>
-                              <m:nor/>
-                            </m:rPr>
-                            <a:rPr lang="en-US" i="0" smtClean="0">
-                              <a:latin typeface="Cambria Math" panose="02040503050406030204" pitchFamily="18" charset="0"/>
-                            </a:rPr>
-                            <m:t>or</m:t>
-                          </m:r>
-                          <m:r>
-                            <m:rPr>
-                              <m:nor/>
-                            </m:rPr>
-                            <a:rPr lang="en-US" i="0" smtClean="0">
-                              <a:latin typeface="Cambria Math" panose="02040503050406030204" pitchFamily="18" charset="0"/>
-                            </a:rPr>
-                            <m:t> </m:t>
-                          </m:r>
-                          <m:r>
-                            <a:rPr lang="en-US" i="1" smtClean="0">
-                              <a:latin typeface="Cambria Math" panose="02040503050406030204" pitchFamily="18" charset="0"/>
-                            </a:rPr>
-                            <m:t>𝑌</m:t>
-                          </m:r>
-                          <m:r>
-                            <a:rPr lang="en-US" i="1" smtClean="0">
-                              <a:latin typeface="Cambria Math" panose="02040503050406030204" pitchFamily="18" charset="0"/>
-                            </a:rPr>
-                            <m:t>1−</m:t>
-                          </m:r>
-                          <m:r>
-                            <a:rPr lang="en-US" i="1" smtClean="0">
-                              <a:latin typeface="Cambria Math" panose="02040503050406030204" pitchFamily="18" charset="0"/>
-                            </a:rPr>
-                            <m:t>𝑌</m:t>
-                          </m:r>
-                          <m:r>
-                            <a:rPr lang="en-US" i="1" smtClean="0">
-                              <a:latin typeface="Cambria Math" panose="02040503050406030204" pitchFamily="18" charset="0"/>
-                            </a:rPr>
-                            <m:t>0</m:t>
-                          </m:r>
-                        </m:sub>
-                      </m:sSub>
-                      <m:r>
-                        <a:rPr lang="en-US" i="1" smtClean="0">
-                          <a:latin typeface="Cambria Math" panose="02040503050406030204" pitchFamily="18" charset="0"/>
-                        </a:rPr>
-                        <m:t>+</m:t>
-                      </m:r>
-                      <m:sSub>
-                        <m:sSubPr>
-                          <m:ctrlPr>
-                            <a:rPr lang="en-US" i="1" smtClean="0">
-                              <a:latin typeface="Cambria Math" panose="02040503050406030204" pitchFamily="18" charset="0"/>
-                            </a:rPr>
-                          </m:ctrlPr>
-                        </m:sSubPr>
-                        <m:e>
-                          <m:r>
-                            <a:rPr lang="en-US" i="1" smtClean="0">
-                              <a:latin typeface="Cambria Math" panose="02040503050406030204" pitchFamily="18" charset="0"/>
-                            </a:rPr>
-                            <m:t>𝛽</m:t>
-                          </m:r>
-                        </m:e>
-                        <m:sub>
-                          <m:r>
-                            <a:rPr lang="en-US" i="1" smtClean="0">
-                              <a:latin typeface="Cambria Math" panose="02040503050406030204" pitchFamily="18" charset="0"/>
-                            </a:rPr>
-                            <m:t>2</m:t>
-                          </m:r>
-                        </m:sub>
-                      </m:sSub>
-                      <m:r>
-                        <a:rPr lang="en-US" i="1" smtClean="0">
-                          <a:latin typeface="Cambria Math" panose="02040503050406030204" pitchFamily="18" charset="0"/>
-                        </a:rPr>
-                        <m:t>𝑂𝑢𝑡𝑐𝑜𝑚</m:t>
-                      </m:r>
-                      <m:sSub>
-                        <m:sSubPr>
-                          <m:ctrlPr>
-                            <a:rPr lang="en-US" i="1" smtClean="0">
-                              <a:latin typeface="Cambria Math" panose="02040503050406030204" pitchFamily="18" charset="0"/>
-                            </a:rPr>
-                          </m:ctrlPr>
-                        </m:sSubPr>
-                        <m:e>
-                          <m:r>
-                            <a:rPr lang="en-US" i="1" smtClean="0">
-                              <a:latin typeface="Cambria Math" panose="02040503050406030204" pitchFamily="18" charset="0"/>
-                            </a:rPr>
-                            <m:t>𝑒</m:t>
-                          </m:r>
-                        </m:e>
-                        <m:sub>
-                          <m:r>
-                            <a:rPr lang="en-US" i="1" smtClean="0">
-                              <a:latin typeface="Cambria Math" panose="02040503050406030204" pitchFamily="18" charset="0"/>
-                            </a:rPr>
-                            <m:t>𝑌</m:t>
-                          </m:r>
-                          <m:r>
-                            <a:rPr lang="en-US" i="1" smtClean="0">
-                              <a:latin typeface="Cambria Math" panose="02040503050406030204" pitchFamily="18" charset="0"/>
-                            </a:rPr>
-                            <m:t>0</m:t>
-                          </m:r>
-                        </m:sub>
-                      </m:sSub>
-                      <m:r>
-                        <a:rPr lang="en-US" i="1" smtClean="0">
-                          <a:latin typeface="Cambria Math" panose="02040503050406030204" pitchFamily="18" charset="0"/>
-                        </a:rPr>
-                        <m:t>+</m:t>
-                      </m:r>
-                      <m:sSub>
-                        <m:sSubPr>
-                          <m:ctrlPr>
-                            <a:rPr lang="en-US" i="1" smtClean="0">
-                              <a:latin typeface="Cambria Math" panose="02040503050406030204" pitchFamily="18" charset="0"/>
-                            </a:rPr>
-                          </m:ctrlPr>
-                        </m:sSubPr>
-                        <m:e>
-                          <m:r>
-                            <a:rPr lang="en-US" i="1" smtClean="0">
-                              <a:latin typeface="Cambria Math" panose="02040503050406030204" pitchFamily="18" charset="0"/>
-                            </a:rPr>
-                            <m:t>𝛽</m:t>
-                          </m:r>
-                        </m:e>
-                        <m:sub>
-                          <m:r>
-                            <a:rPr lang="en-US" i="1" smtClean="0">
-                              <a:latin typeface="Cambria Math" panose="02040503050406030204" pitchFamily="18" charset="0"/>
-                            </a:rPr>
-                            <m:t>𝑛</m:t>
-                          </m:r>
-                        </m:sub>
-                      </m:sSub>
-                      <m:r>
-                        <a:rPr lang="en-US" i="1" smtClean="0">
-                          <a:latin typeface="Cambria Math" panose="02040503050406030204" pitchFamily="18" charset="0"/>
-                        </a:rPr>
-                        <m:t>𝐶𝑜𝑣𝑎𝑟𝑖𝑎𝑡𝑒𝑠</m:t>
-                      </m:r>
-                      <m:r>
-                        <a:rPr lang="en-US" i="1" smtClean="0">
-                          <a:latin typeface="Cambria Math" panose="02040503050406030204" pitchFamily="18" charset="0"/>
-                        </a:rPr>
-                        <m:t>+</m:t>
-                      </m:r>
-                      <m:r>
-                        <a:rPr lang="en-US" i="1" smtClean="0">
-                          <a:latin typeface="Cambria Math" panose="02040503050406030204" pitchFamily="18" charset="0"/>
-                        </a:rPr>
-                        <m:t>𝜖</m:t>
-                      </m:r>
-                    </m:oMath>
-                  </m:oMathPara>
+                  <m:oMath xmlns:m="http://schemas.openxmlformats.org/officeDocument/2006/math">
+                    <m:sSub>
+                      <m:sSubPr>
+                        <m:ctrlPr>
+                          <a:rPr lang="en-US" i="1" smtClean="0">
+                            <a:latin typeface="Cambria Math" panose="02040503050406030204" pitchFamily="18" charset="0"/>
+                          </a:rPr>
+                        </m:ctrlPr>
+                      </m:sSubPr>
+                      <m:e>
+                        <m:r>
+                          <m:rPr>
+                            <m:sty m:val="p"/>
+                          </m:rPr>
+                          <a:rPr lang="en-US" b="0" i="1" smtClean="0">
+                            <a:latin typeface="Cambria Math" panose="02040503050406030204" pitchFamily="18" charset="0"/>
+                          </a:rPr>
+                          <m:t>Outcome</m:t>
+                        </m:r>
+                      </m:e>
+                      <m:sub>
+                        <m:r>
+                          <m:rPr>
+                            <m:sty m:val="p"/>
+                          </m:rPr>
+                          <a:rPr lang="en-US" b="0" i="1" smtClean="0">
+                            <a:latin typeface="Cambria Math" panose="02040503050406030204" pitchFamily="18" charset="0"/>
+                          </a:rPr>
+                          <m:t>Y</m:t>
+                        </m:r>
+                        <m:r>
+                          <a:rPr lang="en-US" b="0" i="1" smtClean="0">
+                            <a:latin typeface="Cambria Math" panose="02040503050406030204" pitchFamily="18" charset="0"/>
+                          </a:rPr>
+                          <m:t>1-</m:t>
+                        </m:r>
+                        <m:r>
+                          <m:rPr>
+                            <m:sty m:val="p"/>
+                          </m:rPr>
+                          <a:rPr lang="en-US" b="0" i="1" smtClean="0">
+                            <a:latin typeface="Cambria Math" panose="02040503050406030204" pitchFamily="18" charset="0"/>
+                          </a:rPr>
+                          <m:t>Y</m:t>
+                        </m:r>
+                        <m:r>
+                          <a:rPr lang="en-US" b="0" i="1" smtClean="0">
+                            <a:latin typeface="Cambria Math" panose="02040503050406030204" pitchFamily="18" charset="0"/>
+                          </a:rPr>
+                          <m:t>0</m:t>
+                        </m:r>
+                      </m:sub>
+                    </m:sSub>
+                    <m:r>
+                      <a:rPr lang="en-US" b="0" i="1" smtClean="0">
+                        <a:latin typeface="Cambria Math" panose="02040503050406030204" pitchFamily="18" charset="0"/>
+                      </a:rPr>
+                      <m:t> = </m:t>
+                    </m:r>
+                    <m:sSub>
+                      <m:sSubPr>
+                        <m:ctrlPr>
+                          <a:rPr lang="en-US" b="0" i="1" smtClean="0">
+                            <a:latin typeface="Cambria Math" panose="02040503050406030204" pitchFamily="18" charset="0"/>
+                          </a:rPr>
+                        </m:ctrlPr>
+                      </m:sSubPr>
+                      <m:e>
+                        <m:r>
+                          <a:rPr lang="en-US" b="0" i="1" smtClean="0">
+                            <a:latin typeface="Cambria Math" panose="02040503050406030204" pitchFamily="18" charset="0"/>
+                            <a:ea typeface="Cambria Math" panose="02040503050406030204" pitchFamily="18" charset="0"/>
+                          </a:rPr>
+                          <m:t>𝛽</m:t>
+                        </m:r>
+                      </m:e>
+                      <m:sub>
+                        <m:r>
+                          <a:rPr lang="en-US" b="0" i="1" smtClean="0">
+                            <a:latin typeface="Cambria Math" panose="02040503050406030204" pitchFamily="18" charset="0"/>
+                          </a:rPr>
+                          <m:t>0</m:t>
+                        </m:r>
+                      </m:sub>
+                    </m:sSub>
+                    <m:r>
+                      <a:rPr lang="en-US" b="0" i="1" smtClean="0">
+                        <a:latin typeface="Cambria Math" panose="02040503050406030204" pitchFamily="18" charset="0"/>
+                      </a:rPr>
+                      <m:t>+</m:t>
+                    </m:r>
+                    <m:sSub>
+                      <m:sSubPr>
+                        <m:ctrlPr>
+                          <a:rPr lang="en-US" b="0" i="1" smtClean="0">
+                            <a:latin typeface="Cambria Math" panose="02040503050406030204" pitchFamily="18" charset="0"/>
+                          </a:rPr>
+                        </m:ctrlPr>
+                      </m:sSubPr>
+                      <m:e>
+                        <m:r>
+                          <a:rPr lang="en-US" b="0" i="1" smtClean="0">
+                            <a:latin typeface="Cambria Math" panose="02040503050406030204" pitchFamily="18" charset="0"/>
+                            <a:ea typeface="Cambria Math" panose="02040503050406030204" pitchFamily="18" charset="0"/>
+                          </a:rPr>
+                          <m:t>𝛽</m:t>
+                        </m:r>
+                      </m:e>
+                      <m:sub>
+                        <m:r>
+                          <a:rPr lang="en-US" b="0" i="1" smtClean="0">
+                            <a:latin typeface="Cambria Math" panose="02040503050406030204" pitchFamily="18" charset="0"/>
+                          </a:rPr>
+                          <m:t>1</m:t>
+                        </m:r>
+                      </m:sub>
+                    </m:sSub>
+                    <m:sSub>
+                      <m:sSubPr>
+                        <m:ctrlPr>
+                          <a:rPr lang="en-US" b="0" i="1" smtClean="0">
+                            <a:latin typeface="Cambria Math" panose="02040503050406030204" pitchFamily="18" charset="0"/>
+                          </a:rPr>
+                        </m:ctrlPr>
+                      </m:sSubPr>
+                      <m:e>
+                        <m:r>
+                          <m:rPr>
+                            <m:sty m:val="p"/>
+                          </m:rPr>
+                          <a:rPr lang="en-US" b="0" i="1" smtClean="0">
+                            <a:latin typeface="Cambria Math" panose="02040503050406030204" pitchFamily="18" charset="0"/>
+                          </a:rPr>
+                          <m:t>Marker</m:t>
+                        </m:r>
+                      </m:e>
+                      <m:sub>
+                        <m:r>
+                          <m:rPr>
+                            <m:sty m:val="p"/>
+                          </m:rPr>
+                          <a:rPr lang="en-US" b="0" i="1" smtClean="0">
+                            <a:latin typeface="Cambria Math" panose="02040503050406030204" pitchFamily="18" charset="0"/>
+                          </a:rPr>
+                          <m:t>Y</m:t>
+                        </m:r>
+                        <m:r>
+                          <a:rPr lang="en-US" b="0" i="1" smtClean="0">
+                            <a:latin typeface="Cambria Math" panose="02040503050406030204" pitchFamily="18" charset="0"/>
+                          </a:rPr>
+                          <m:t>1 </m:t>
+                        </m:r>
+                        <m:r>
+                          <m:rPr>
+                            <m:sty m:val="p"/>
+                          </m:rPr>
+                          <a:rPr lang="en-US" b="0" i="1" smtClean="0">
+                            <a:latin typeface="Cambria Math" panose="02040503050406030204" pitchFamily="18" charset="0"/>
+                          </a:rPr>
+                          <m:t>or</m:t>
+                        </m:r>
+                        <m:r>
+                          <a:rPr lang="en-US" b="0" i="1" smtClean="0">
+                            <a:latin typeface="Cambria Math" panose="02040503050406030204" pitchFamily="18" charset="0"/>
+                          </a:rPr>
+                          <m:t> </m:t>
+                        </m:r>
+                        <m:r>
+                          <m:rPr>
+                            <m:sty m:val="p"/>
+                          </m:rPr>
+                          <a:rPr lang="en-US" b="0" i="1" smtClean="0">
+                            <a:latin typeface="Cambria Math" panose="02040503050406030204" pitchFamily="18" charset="0"/>
+                          </a:rPr>
+                          <m:t>Y</m:t>
+                        </m:r>
+                        <m:r>
+                          <a:rPr lang="en-US" b="0" i="1" smtClean="0">
+                            <a:latin typeface="Cambria Math" panose="02040503050406030204" pitchFamily="18" charset="0"/>
+                          </a:rPr>
+                          <m:t>1 - </m:t>
+                        </m:r>
+                        <m:r>
+                          <m:rPr>
+                            <m:sty m:val="p"/>
+                          </m:rPr>
+                          <a:rPr lang="en-US" b="0" i="1" smtClean="0">
+                            <a:latin typeface="Cambria Math" panose="02040503050406030204" pitchFamily="18" charset="0"/>
+                          </a:rPr>
+                          <m:t>Y</m:t>
+                        </m:r>
+                        <m:r>
+                          <a:rPr lang="en-US" b="0" i="1" smtClean="0">
+                            <a:latin typeface="Cambria Math" panose="02040503050406030204" pitchFamily="18" charset="0"/>
+                          </a:rPr>
+                          <m:t>0</m:t>
+                        </m:r>
+                      </m:sub>
+                    </m:sSub>
+                    <m:r>
+                      <a:rPr lang="en-US" b="0" i="1" smtClean="0">
+                        <a:latin typeface="Cambria Math" panose="02040503050406030204" pitchFamily="18" charset="0"/>
+                      </a:rPr>
+                      <m:t> + </m:t>
+                    </m:r>
+                    <m:sSub>
+                      <m:sSubPr>
+                        <m:ctrlPr>
+                          <a:rPr lang="en-US" b="0" i="1" smtClean="0">
+                            <a:latin typeface="Cambria Math" panose="02040503050406030204" pitchFamily="18" charset="0"/>
+                          </a:rPr>
+                        </m:ctrlPr>
+                      </m:sSubPr>
+                      <m:e>
+                        <m:r>
+                          <a:rPr lang="en-US" b="0" i="1" smtClean="0">
+                            <a:latin typeface="Cambria Math" panose="02040503050406030204" pitchFamily="18" charset="0"/>
+                            <a:ea typeface="Cambria Math" panose="02040503050406030204" pitchFamily="18" charset="0"/>
+                          </a:rPr>
+                          <m:t>𝛽</m:t>
+                        </m:r>
+                      </m:e>
+                      <m:sub>
+                        <m:r>
+                          <a:rPr lang="en-US" b="0" i="1" smtClean="0">
+                            <a:latin typeface="Cambria Math" panose="02040503050406030204" pitchFamily="18" charset="0"/>
+                          </a:rPr>
+                          <m:t>2</m:t>
+                        </m:r>
+                      </m:sub>
+                    </m:sSub>
+                    <m:sSub>
+                      <m:sSubPr>
+                        <m:ctrlPr>
+                          <a:rPr lang="en-US" b="0" i="1" smtClean="0">
+                            <a:latin typeface="Cambria Math" panose="02040503050406030204" pitchFamily="18" charset="0"/>
+                          </a:rPr>
+                        </m:ctrlPr>
+                      </m:sSubPr>
+                      <m:e>
+                        <m:r>
+                          <m:rPr>
+                            <m:sty m:val="p"/>
+                          </m:rPr>
+                          <a:rPr lang="en-US" b="0" i="1" smtClean="0">
+                            <a:latin typeface="Cambria Math" panose="02040503050406030204" pitchFamily="18" charset="0"/>
+                          </a:rPr>
+                          <m:t>Outcome</m:t>
+                        </m:r>
+                      </m:e>
+                      <m:sub>
+                        <m:r>
+                          <m:rPr>
+                            <m:sty m:val="p"/>
+                          </m:rPr>
+                          <a:rPr lang="en-US" b="0" i="1" smtClean="0">
+                            <a:latin typeface="Cambria Math" panose="02040503050406030204" pitchFamily="18" charset="0"/>
+                          </a:rPr>
+                          <m:t>Y</m:t>
+                        </m:r>
+                        <m:r>
+                          <a:rPr lang="en-US" b="0" i="1" smtClean="0">
+                            <a:latin typeface="Cambria Math" panose="02040503050406030204" pitchFamily="18" charset="0"/>
+                          </a:rPr>
+                          <m:t>0</m:t>
+                        </m:r>
+                      </m:sub>
+                    </m:sSub>
+                    <m:r>
+                      <a:rPr lang="en-US" b="0" i="1" smtClean="0">
+                        <a:latin typeface="Cambria Math" panose="02040503050406030204" pitchFamily="18" charset="0"/>
+                      </a:rPr>
+                      <m:t>+</m:t>
+                    </m:r>
+                    <m:sSub>
+                      <m:sSubPr>
+                        <m:ctrlPr>
+                          <a:rPr lang="en-US" b="0" i="1" smtClean="0">
+                            <a:latin typeface="Cambria Math" panose="02040503050406030204" pitchFamily="18" charset="0"/>
+                          </a:rPr>
+                        </m:ctrlPr>
+                      </m:sSubPr>
+                      <m:e>
+                        <m:r>
+                          <a:rPr lang="en-US" b="0" i="1" smtClean="0">
+                            <a:latin typeface="Cambria Math" panose="02040503050406030204" pitchFamily="18" charset="0"/>
+                            <a:ea typeface="Cambria Math" panose="02040503050406030204" pitchFamily="18" charset="0"/>
+                          </a:rPr>
+                          <m:t>𝛽</m:t>
+                        </m:r>
+                      </m:e>
+                      <m:sub>
+                        <m:r>
+                          <m:rPr>
+                            <m:sty m:val="p"/>
+                          </m:rPr>
+                          <a:rPr lang="en-US" b="0" i="1" smtClean="0">
+                            <a:latin typeface="Cambria Math" panose="02040503050406030204" pitchFamily="18" charset="0"/>
+                          </a:rPr>
+                          <m:t>n</m:t>
+                        </m:r>
+                      </m:sub>
+                    </m:sSub>
+                    <m:r>
+                      <m:rPr>
+                        <m:sty m:val="p"/>
+                      </m:rPr>
+                      <a:rPr lang="en-US" b="0" i="1" smtClean="0">
+                        <a:latin typeface="Cambria Math" panose="02040503050406030204" pitchFamily="18" charset="0"/>
+                      </a:rPr>
+                      <m:t>Covariates</m:t>
+                    </m:r>
+                    <m:r>
+                      <a:rPr lang="en-US" b="0" i="1" smtClean="0">
+                        <a:latin typeface="Cambria Math" panose="02040503050406030204" pitchFamily="18" charset="0"/>
+                      </a:rPr>
+                      <m:t> + </m:t>
+                    </m:r>
+                    <m:r>
+                      <a:rPr lang="en-US" b="0" i="1" smtClean="0">
+                        <a:latin typeface="Cambria Math" panose="02040503050406030204" pitchFamily="18" charset="0"/>
+                        <a:ea typeface="Cambria Math" panose="02040503050406030204" pitchFamily="18" charset="0"/>
+                      </a:rPr>
+                      <m:t>𝜀</m:t>
+                    </m:r>
+                  </m:oMath>
                 </a14:m>
                 <a:endParaRPr lang="en-US" dirty="0"/>
               </a:p>
@@ -5279,7 +4739,13 @@
                 <a:pPr marL="0" indent="0">
                   <a:buNone/>
                 </a:pPr>
-                <a:endParaRPr lang="en-US" sz="2400" dirty="0"/>
+                <a:endParaRPr lang="en-US" dirty="0"/>
+              </a:p>
+              <a:p>
+                <a:pPr marL="0" indent="0">
+                  <a:buNone/>
+                </a:pPr>
+                <a:endParaRPr lang="en-US" dirty="0"/>
               </a:p>
             </p:txBody>
           </p:sp>
@@ -5287,10 +4753,10 @@
         <mc:Fallback>
           <p:sp>
             <p:nvSpPr>
-              <p:cNvPr id="5" name="Content Placeholder 4">
+              <p:cNvPr id="3" name="Content Placeholder 2">
                 <a:extLst>
                   <a:ext uri="{FF2B5EF4-FFF2-40B4-BE49-F238E27FC236}">
-                    <a16:creationId xmlns:a16="http://schemas.microsoft.com/office/drawing/2014/main" id="{7DEB2388-59F8-42F4-0DAD-CDC49B3969F6}"/>
+                    <a16:creationId xmlns:a16="http://schemas.microsoft.com/office/drawing/2014/main" id="{7CDF675F-404B-0F09-70EB-F798CE3CEC55}"/>
                   </a:ext>
                 </a:extLst>
               </p:cNvPr>
@@ -5304,12 +4770,12 @@
             <p:spPr>
               <a:xfrm>
                 <a:off x="838200" y="1690688"/>
-                <a:ext cx="5084064" cy="2392807"/>
+                <a:ext cx="4038600" cy="4351338"/>
               </a:xfrm>
               <a:blipFill>
-                <a:blip r:embed="rId3"/>
+                <a:blip r:embed="rId2"/>
                 <a:stretch>
-                  <a:fillRect l="-2518" t="-4326"/>
+                  <a:fillRect l="-3172" t="-2381"/>
                 </a:stretch>
               </a:blipFill>
             </p:spPr>
@@ -5332,10 +4798,10 @@
         <mc:Choice xmlns:a14="http://schemas.microsoft.com/office/drawing/2010/main" Requires="a14">
           <p:sp>
             <p:nvSpPr>
-              <p:cNvPr id="12" name="Content Placeholder 4">
+              <p:cNvPr id="4" name="Content Placeholder 2">
                 <a:extLst>
                   <a:ext uri="{FF2B5EF4-FFF2-40B4-BE49-F238E27FC236}">
-                    <a16:creationId xmlns:a16="http://schemas.microsoft.com/office/drawing/2014/main" id="{C7FB2D84-EFBF-6B49-4764-34644694BC48}"/>
+                    <a16:creationId xmlns:a16="http://schemas.microsoft.com/office/drawing/2014/main" id="{1AC1B729-0183-05D0-28CD-089B160F76B1}"/>
                   </a:ext>
                 </a:extLst>
               </p:cNvPr>
@@ -5346,8 +4812,8 @@
             </p:nvSpPr>
             <p:spPr>
               <a:xfrm>
-                <a:off x="6269738" y="1690687"/>
-                <a:ext cx="5084064" cy="2392807"/>
+                <a:off x="5848141" y="1690688"/>
+                <a:ext cx="5505659" cy="2740635"/>
               </a:xfrm>
               <a:prstGeom prst="rect">
                 <a:avLst/>
@@ -5355,7 +4821,7 @@
             </p:spPr>
             <p:txBody>
               <a:bodyPr vert="horz" lIns="91440" tIns="45720" rIns="91440" bIns="45720" rtlCol="0">
-                <a:normAutofit/>
+                <a:normAutofit fontScale="92500"/>
               </a:bodyPr>
               <a:lstStyle>
                 <a:lvl1pPr marL="228600" indent="-228600" algn="l" defTabSz="914400" rtl="0" eaLnBrk="1" latinLnBrk="0" hangingPunct="1">
@@ -5528,14 +4994,14 @@
                 </a:pPr>
                 <a:r>
                   <a:rPr lang="en-US" dirty="0"/>
-                  <a:t>Aim 2 (</a:t>
+                  <a:t>Aim 2: </a:t>
                 </a:r>
                 <a14:m>
                   <m:oMath xmlns:m="http://schemas.openxmlformats.org/officeDocument/2006/math">
                     <m:sSub>
                       <m:sSubPr>
                         <m:ctrlPr>
-                          <a:rPr lang="en-US" i="1">
+                          <a:rPr lang="en-US" i="1" smtClean="0">
                             <a:latin typeface="Cambria Math" panose="02040503050406030204" pitchFamily="18" charset="0"/>
                           </a:rPr>
                         </m:ctrlPr>
@@ -5553,14 +5019,13 @@
                         <m:r>
                           <a:rPr lang="en-US" b="0" i="1" smtClean="0">
                             <a:latin typeface="Cambria Math" panose="02040503050406030204" pitchFamily="18" charset="0"/>
-                            <a:ea typeface="Cambria Math" panose="02040503050406030204" pitchFamily="18" charset="0"/>
                           </a:rPr>
                           <m:t>3</m:t>
                         </m:r>
                       </m:sub>
                     </m:sSub>
                     <m:r>
-                      <a:rPr lang="en-US" i="1">
+                      <a:rPr lang="en-US" i="1" smtClean="0">
                         <a:latin typeface="Cambria Math" panose="02040503050406030204" pitchFamily="18" charset="0"/>
                         <a:ea typeface="Cambria Math" panose="02040503050406030204" pitchFamily="18" charset="0"/>
                       </a:rPr>
@@ -5568,580 +5033,585 @@
                     </m:r>
                   </m:oMath>
                 </a14:m>
-                <a:r>
-                  <a:rPr lang="en-US" dirty="0"/>
-                  <a:t>)</a:t>
-                </a:r>
-                <a:endParaRPr lang="en-US" dirty="0">
-                  <a:latin typeface="Cambria Math" panose="02040503050406030204" pitchFamily="18" charset="0"/>
-                </a:endParaRPr>
+                <a:endParaRPr lang="en-US" dirty="0"/>
+              </a:p>
+              <a:p>
+                <a14:m>
+                  <m:oMath xmlns:m="http://schemas.openxmlformats.org/officeDocument/2006/math">
+                    <m:sSub>
+                      <m:sSubPr>
+                        <m:ctrlPr>
+                          <a:rPr lang="en-US" i="1" smtClean="0">
+                            <a:latin typeface="Cambria Math" panose="02040503050406030204" pitchFamily="18" charset="0"/>
+                          </a:rPr>
+                        </m:ctrlPr>
+                      </m:sSubPr>
+                      <m:e>
+                        <m:r>
+                          <m:rPr>
+                            <m:sty m:val="p"/>
+                          </m:rPr>
+                          <a:rPr lang="en-US" i="1" smtClean="0">
+                            <a:latin typeface="Cambria Math" panose="02040503050406030204" pitchFamily="18" charset="0"/>
+                          </a:rPr>
+                          <m:t>Outcome</m:t>
+                        </m:r>
+                      </m:e>
+                      <m:sub>
+                        <m:r>
+                          <m:rPr>
+                            <m:sty m:val="p"/>
+                          </m:rPr>
+                          <a:rPr lang="en-US" i="1" smtClean="0">
+                            <a:latin typeface="Cambria Math" panose="02040503050406030204" pitchFamily="18" charset="0"/>
+                          </a:rPr>
+                          <m:t>Y</m:t>
+                        </m:r>
+                        <m:r>
+                          <a:rPr lang="en-US" i="1" smtClean="0">
+                            <a:latin typeface="Cambria Math" panose="02040503050406030204" pitchFamily="18" charset="0"/>
+                          </a:rPr>
+                          <m:t>1-</m:t>
+                        </m:r>
+                        <m:r>
+                          <m:rPr>
+                            <m:sty m:val="p"/>
+                          </m:rPr>
+                          <a:rPr lang="en-US" i="1" smtClean="0">
+                            <a:latin typeface="Cambria Math" panose="02040503050406030204" pitchFamily="18" charset="0"/>
+                          </a:rPr>
+                          <m:t>Y</m:t>
+                        </m:r>
+                        <m:r>
+                          <a:rPr lang="en-US" i="1" smtClean="0">
+                            <a:latin typeface="Cambria Math" panose="02040503050406030204" pitchFamily="18" charset="0"/>
+                          </a:rPr>
+                          <m:t>0</m:t>
+                        </m:r>
+                      </m:sub>
+                    </m:sSub>
+                    <m:r>
+                      <a:rPr lang="en-US" i="1" smtClean="0">
+                        <a:latin typeface="Cambria Math" panose="02040503050406030204" pitchFamily="18" charset="0"/>
+                      </a:rPr>
+                      <m:t> = </m:t>
+                    </m:r>
+                    <m:sSub>
+                      <m:sSubPr>
+                        <m:ctrlPr>
+                          <a:rPr lang="en-US" i="1" smtClean="0">
+                            <a:latin typeface="Cambria Math" panose="02040503050406030204" pitchFamily="18" charset="0"/>
+                          </a:rPr>
+                        </m:ctrlPr>
+                      </m:sSubPr>
+                      <m:e>
+                        <m:r>
+                          <a:rPr lang="en-US" i="1" smtClean="0">
+                            <a:latin typeface="Cambria Math" panose="02040503050406030204" pitchFamily="18" charset="0"/>
+                            <a:ea typeface="Cambria Math" panose="02040503050406030204" pitchFamily="18" charset="0"/>
+                          </a:rPr>
+                          <m:t>𝛽</m:t>
+                        </m:r>
+                      </m:e>
+                      <m:sub>
+                        <m:r>
+                          <a:rPr lang="en-US" i="1" smtClean="0">
+                            <a:latin typeface="Cambria Math" panose="02040503050406030204" pitchFamily="18" charset="0"/>
+                          </a:rPr>
+                          <m:t>0</m:t>
+                        </m:r>
+                      </m:sub>
+                    </m:sSub>
+                    <m:r>
+                      <a:rPr lang="en-US" i="1" smtClean="0">
+                        <a:latin typeface="Cambria Math" panose="02040503050406030204" pitchFamily="18" charset="0"/>
+                      </a:rPr>
+                      <m:t>+</m:t>
+                    </m:r>
+                    <m:sSub>
+                      <m:sSubPr>
+                        <m:ctrlPr>
+                          <a:rPr lang="en-US" i="1" smtClean="0">
+                            <a:latin typeface="Cambria Math" panose="02040503050406030204" pitchFamily="18" charset="0"/>
+                          </a:rPr>
+                        </m:ctrlPr>
+                      </m:sSubPr>
+                      <m:e>
+                        <m:r>
+                          <a:rPr lang="en-US" i="1" smtClean="0">
+                            <a:latin typeface="Cambria Math" panose="02040503050406030204" pitchFamily="18" charset="0"/>
+                            <a:ea typeface="Cambria Math" panose="02040503050406030204" pitchFamily="18" charset="0"/>
+                          </a:rPr>
+                          <m:t>𝛽</m:t>
+                        </m:r>
+                      </m:e>
+                      <m:sub>
+                        <m:r>
+                          <a:rPr lang="en-US" i="1" smtClean="0">
+                            <a:latin typeface="Cambria Math" panose="02040503050406030204" pitchFamily="18" charset="0"/>
+                          </a:rPr>
+                          <m:t>1</m:t>
+                        </m:r>
+                      </m:sub>
+                    </m:sSub>
+                    <m:sSub>
+                      <m:sSubPr>
+                        <m:ctrlPr>
+                          <a:rPr lang="en-US" i="1" smtClean="0">
+                            <a:latin typeface="Cambria Math" panose="02040503050406030204" pitchFamily="18" charset="0"/>
+                          </a:rPr>
+                        </m:ctrlPr>
+                      </m:sSubPr>
+                      <m:e>
+                        <m:r>
+                          <m:rPr>
+                            <m:sty m:val="p"/>
+                          </m:rPr>
+                          <a:rPr lang="en-US" i="1" smtClean="0">
+                            <a:latin typeface="Cambria Math" panose="02040503050406030204" pitchFamily="18" charset="0"/>
+                          </a:rPr>
+                          <m:t>Marker</m:t>
+                        </m:r>
+                      </m:e>
+                      <m:sub>
+                        <m:r>
+                          <m:rPr>
+                            <m:sty m:val="p"/>
+                          </m:rPr>
+                          <a:rPr lang="en-US" i="1" smtClean="0">
+                            <a:latin typeface="Cambria Math" panose="02040503050406030204" pitchFamily="18" charset="0"/>
+                          </a:rPr>
+                          <m:t>Y</m:t>
+                        </m:r>
+                        <m:r>
+                          <a:rPr lang="en-US" i="1" smtClean="0">
+                            <a:latin typeface="Cambria Math" panose="02040503050406030204" pitchFamily="18" charset="0"/>
+                          </a:rPr>
+                          <m:t>1 </m:t>
+                        </m:r>
+                        <m:r>
+                          <m:rPr>
+                            <m:sty m:val="p"/>
+                          </m:rPr>
+                          <a:rPr lang="en-US" i="1" smtClean="0">
+                            <a:latin typeface="Cambria Math" panose="02040503050406030204" pitchFamily="18" charset="0"/>
+                          </a:rPr>
+                          <m:t>or</m:t>
+                        </m:r>
+                        <m:r>
+                          <a:rPr lang="en-US" i="1" smtClean="0">
+                            <a:latin typeface="Cambria Math" panose="02040503050406030204" pitchFamily="18" charset="0"/>
+                          </a:rPr>
+                          <m:t> </m:t>
+                        </m:r>
+                        <m:r>
+                          <m:rPr>
+                            <m:sty m:val="p"/>
+                          </m:rPr>
+                          <a:rPr lang="en-US" i="1" smtClean="0">
+                            <a:latin typeface="Cambria Math" panose="02040503050406030204" pitchFamily="18" charset="0"/>
+                          </a:rPr>
+                          <m:t>Y</m:t>
+                        </m:r>
+                        <m:r>
+                          <a:rPr lang="en-US" i="1" smtClean="0">
+                            <a:latin typeface="Cambria Math" panose="02040503050406030204" pitchFamily="18" charset="0"/>
+                          </a:rPr>
+                          <m:t>1 - </m:t>
+                        </m:r>
+                        <m:r>
+                          <m:rPr>
+                            <m:sty m:val="p"/>
+                          </m:rPr>
+                          <a:rPr lang="en-US" i="1" smtClean="0">
+                            <a:latin typeface="Cambria Math" panose="02040503050406030204" pitchFamily="18" charset="0"/>
+                          </a:rPr>
+                          <m:t>Y</m:t>
+                        </m:r>
+                        <m:r>
+                          <a:rPr lang="en-US" i="1" smtClean="0">
+                            <a:latin typeface="Cambria Math" panose="02040503050406030204" pitchFamily="18" charset="0"/>
+                          </a:rPr>
+                          <m:t>0</m:t>
+                        </m:r>
+                      </m:sub>
+                    </m:sSub>
+                    <m:r>
+                      <a:rPr lang="en-US" i="1" smtClean="0">
+                        <a:latin typeface="Cambria Math" panose="02040503050406030204" pitchFamily="18" charset="0"/>
+                      </a:rPr>
+                      <m:t> +</m:t>
+                    </m:r>
+                    <m:sSub>
+                      <m:sSubPr>
+                        <m:ctrlPr>
+                          <a:rPr lang="en-US" i="1">
+                            <a:latin typeface="Cambria Math" panose="02040503050406030204" pitchFamily="18" charset="0"/>
+                          </a:rPr>
+                        </m:ctrlPr>
+                      </m:sSubPr>
+                      <m:e>
+                        <m:r>
+                          <a:rPr lang="en-US" i="1">
+                            <a:latin typeface="Cambria Math" panose="02040503050406030204" pitchFamily="18" charset="0"/>
+                            <a:ea typeface="Cambria Math" panose="02040503050406030204" pitchFamily="18" charset="0"/>
+                          </a:rPr>
+                          <m:t>𝛽</m:t>
+                        </m:r>
+                      </m:e>
+                      <m:sub>
+                        <m:r>
+                          <a:rPr lang="en-US" i="1">
+                            <a:latin typeface="Cambria Math" panose="02040503050406030204" pitchFamily="18" charset="0"/>
+                          </a:rPr>
+                          <m:t>2</m:t>
+                        </m:r>
+                      </m:sub>
+                    </m:sSub>
+                    <m:sSub>
+                      <m:sSubPr>
+                        <m:ctrlPr>
+                          <a:rPr lang="en-US" i="1">
+                            <a:latin typeface="Cambria Math" panose="02040503050406030204" pitchFamily="18" charset="0"/>
+                          </a:rPr>
+                        </m:ctrlPr>
+                      </m:sSubPr>
+                      <m:e>
+                        <m:r>
+                          <m:rPr>
+                            <m:sty m:val="p"/>
+                          </m:rPr>
+                          <a:rPr lang="en-US" b="0" i="1" smtClean="0">
+                            <a:latin typeface="Cambria Math" panose="02040503050406030204" pitchFamily="18" charset="0"/>
+                          </a:rPr>
+                          <m:t>Amyloid</m:t>
+                        </m:r>
+                      </m:e>
+                      <m:sub>
+                        <m:r>
+                          <m:rPr>
+                            <m:sty m:val="p"/>
+                          </m:rPr>
+                          <a:rPr lang="en-US" i="1">
+                            <a:latin typeface="Cambria Math" panose="02040503050406030204" pitchFamily="18" charset="0"/>
+                          </a:rPr>
+                          <m:t>Y</m:t>
+                        </m:r>
+                        <m:r>
+                          <a:rPr lang="en-US" i="1">
+                            <a:latin typeface="Cambria Math" panose="02040503050406030204" pitchFamily="18" charset="0"/>
+                          </a:rPr>
+                          <m:t>0</m:t>
+                        </m:r>
+                      </m:sub>
+                    </m:sSub>
+                    <m:r>
+                      <a:rPr lang="en-US" b="0" i="1" smtClean="0">
+                        <a:latin typeface="Cambria Math" panose="02040503050406030204" pitchFamily="18" charset="0"/>
+                      </a:rPr>
+                      <m:t>+</m:t>
+                    </m:r>
+                    <m:sSub>
+                      <m:sSubPr>
+                        <m:ctrlPr>
+                          <a:rPr lang="en-US" i="1">
+                            <a:latin typeface="Cambria Math" panose="02040503050406030204" pitchFamily="18" charset="0"/>
+                          </a:rPr>
+                        </m:ctrlPr>
+                      </m:sSubPr>
+                      <m:e>
+                        <m:r>
+                          <a:rPr lang="en-US" i="1">
+                            <a:latin typeface="Cambria Math" panose="02040503050406030204" pitchFamily="18" charset="0"/>
+                            <a:ea typeface="Cambria Math" panose="02040503050406030204" pitchFamily="18" charset="0"/>
+                          </a:rPr>
+                          <m:t>𝛽</m:t>
+                        </m:r>
+                      </m:e>
+                      <m:sub>
+                        <m:r>
+                          <a:rPr lang="en-US" b="0" i="1" smtClean="0">
+                            <a:latin typeface="Cambria Math" panose="02040503050406030204" pitchFamily="18" charset="0"/>
+                            <a:ea typeface="Cambria Math" panose="02040503050406030204" pitchFamily="18" charset="0"/>
+                          </a:rPr>
+                          <m:t>3</m:t>
+                        </m:r>
+                      </m:sub>
+                    </m:sSub>
+                    <m:sSub>
+                      <m:sSubPr>
+                        <m:ctrlPr>
+                          <a:rPr lang="en-US" i="1">
+                            <a:latin typeface="Cambria Math" panose="02040503050406030204" pitchFamily="18" charset="0"/>
+                          </a:rPr>
+                        </m:ctrlPr>
+                      </m:sSubPr>
+                      <m:e>
+                        <m:r>
+                          <m:rPr>
+                            <m:sty m:val="p"/>
+                          </m:rPr>
+                          <a:rPr lang="en-US" i="1">
+                            <a:latin typeface="Cambria Math" panose="02040503050406030204" pitchFamily="18" charset="0"/>
+                          </a:rPr>
+                          <m:t>Marker</m:t>
+                        </m:r>
+                      </m:e>
+                      <m:sub>
+                        <m:r>
+                          <m:rPr>
+                            <m:sty m:val="p"/>
+                          </m:rPr>
+                          <a:rPr lang="en-US" i="1">
+                            <a:latin typeface="Cambria Math" panose="02040503050406030204" pitchFamily="18" charset="0"/>
+                          </a:rPr>
+                          <m:t>Y</m:t>
+                        </m:r>
+                        <m:r>
+                          <a:rPr lang="en-US" i="1">
+                            <a:latin typeface="Cambria Math" panose="02040503050406030204" pitchFamily="18" charset="0"/>
+                          </a:rPr>
+                          <m:t>1 </m:t>
+                        </m:r>
+                        <m:r>
+                          <m:rPr>
+                            <m:sty m:val="p"/>
+                          </m:rPr>
+                          <a:rPr lang="en-US" i="1">
+                            <a:latin typeface="Cambria Math" panose="02040503050406030204" pitchFamily="18" charset="0"/>
+                          </a:rPr>
+                          <m:t>or</m:t>
+                        </m:r>
+                        <m:r>
+                          <a:rPr lang="en-US" i="1">
+                            <a:latin typeface="Cambria Math" panose="02040503050406030204" pitchFamily="18" charset="0"/>
+                          </a:rPr>
+                          <m:t> </m:t>
+                        </m:r>
+                        <m:r>
+                          <m:rPr>
+                            <m:sty m:val="p"/>
+                          </m:rPr>
+                          <a:rPr lang="en-US" i="1">
+                            <a:latin typeface="Cambria Math" panose="02040503050406030204" pitchFamily="18" charset="0"/>
+                          </a:rPr>
+                          <m:t>Y</m:t>
+                        </m:r>
+                        <m:r>
+                          <a:rPr lang="en-US" i="1">
+                            <a:latin typeface="Cambria Math" panose="02040503050406030204" pitchFamily="18" charset="0"/>
+                          </a:rPr>
+                          <m:t>1 − </m:t>
+                        </m:r>
+                        <m:r>
+                          <m:rPr>
+                            <m:sty m:val="p"/>
+                          </m:rPr>
+                          <a:rPr lang="en-US" i="1">
+                            <a:latin typeface="Cambria Math" panose="02040503050406030204" pitchFamily="18" charset="0"/>
+                          </a:rPr>
+                          <m:t>Y</m:t>
+                        </m:r>
+                        <m:r>
+                          <a:rPr lang="en-US" i="1">
+                            <a:latin typeface="Cambria Math" panose="02040503050406030204" pitchFamily="18" charset="0"/>
+                          </a:rPr>
+                          <m:t>0</m:t>
+                        </m:r>
+                      </m:sub>
+                    </m:sSub>
+                    <m:r>
+                      <a:rPr lang="en-US" b="0" i="1" smtClean="0">
+                        <a:latin typeface="Cambria Math" panose="02040503050406030204" pitchFamily="18" charset="0"/>
+                      </a:rPr>
+                      <m:t>*</m:t>
+                    </m:r>
+                    <m:sSub>
+                      <m:sSubPr>
+                        <m:ctrlPr>
+                          <a:rPr lang="en-US" i="1">
+                            <a:latin typeface="Cambria Math" panose="02040503050406030204" pitchFamily="18" charset="0"/>
+                          </a:rPr>
+                        </m:ctrlPr>
+                      </m:sSubPr>
+                      <m:e>
+                        <m:r>
+                          <m:rPr>
+                            <m:sty m:val="p"/>
+                          </m:rPr>
+                          <a:rPr lang="en-US" i="1">
+                            <a:latin typeface="Cambria Math" panose="02040503050406030204" pitchFamily="18" charset="0"/>
+                          </a:rPr>
+                          <m:t>Amyloid</m:t>
+                        </m:r>
+                      </m:e>
+                      <m:sub>
+                        <m:r>
+                          <m:rPr>
+                            <m:sty m:val="p"/>
+                          </m:rPr>
+                          <a:rPr lang="en-US" i="1">
+                            <a:latin typeface="Cambria Math" panose="02040503050406030204" pitchFamily="18" charset="0"/>
+                          </a:rPr>
+                          <m:t>Y</m:t>
+                        </m:r>
+                        <m:r>
+                          <a:rPr lang="en-US" i="1">
+                            <a:latin typeface="Cambria Math" panose="02040503050406030204" pitchFamily="18" charset="0"/>
+                          </a:rPr>
+                          <m:t>0</m:t>
+                        </m:r>
+                      </m:sub>
+                    </m:sSub>
+                    <m:r>
+                      <a:rPr lang="en-US" b="0" i="1" smtClean="0">
+                        <a:latin typeface="Cambria Math" panose="02040503050406030204" pitchFamily="18" charset="0"/>
+                      </a:rPr>
+                      <m:t>+</m:t>
+                    </m:r>
+                    <m:sSub>
+                      <m:sSubPr>
+                        <m:ctrlPr>
+                          <a:rPr lang="en-US" i="1" smtClean="0">
+                            <a:latin typeface="Cambria Math" panose="02040503050406030204" pitchFamily="18" charset="0"/>
+                          </a:rPr>
+                        </m:ctrlPr>
+                      </m:sSubPr>
+                      <m:e>
+                        <m:r>
+                          <a:rPr lang="en-US" i="1" smtClean="0">
+                            <a:latin typeface="Cambria Math" panose="02040503050406030204" pitchFamily="18" charset="0"/>
+                            <a:ea typeface="Cambria Math" panose="02040503050406030204" pitchFamily="18" charset="0"/>
+                          </a:rPr>
+                          <m:t>𝛽</m:t>
+                        </m:r>
+                      </m:e>
+                      <m:sub>
+                        <m:r>
+                          <a:rPr lang="en-US" b="0" i="1" smtClean="0">
+                            <a:latin typeface="Cambria Math" panose="02040503050406030204" pitchFamily="18" charset="0"/>
+                          </a:rPr>
+                          <m:t>4</m:t>
+                        </m:r>
+                      </m:sub>
+                    </m:sSub>
+                    <m:sSub>
+                      <m:sSubPr>
+                        <m:ctrlPr>
+                          <a:rPr lang="en-US" i="1" smtClean="0">
+                            <a:latin typeface="Cambria Math" panose="02040503050406030204" pitchFamily="18" charset="0"/>
+                          </a:rPr>
+                        </m:ctrlPr>
+                      </m:sSubPr>
+                      <m:e>
+                        <m:r>
+                          <m:rPr>
+                            <m:sty m:val="p"/>
+                          </m:rPr>
+                          <a:rPr lang="en-US" i="1" smtClean="0">
+                            <a:latin typeface="Cambria Math" panose="02040503050406030204" pitchFamily="18" charset="0"/>
+                          </a:rPr>
+                          <m:t>Outcome</m:t>
+                        </m:r>
+                      </m:e>
+                      <m:sub>
+                        <m:r>
+                          <m:rPr>
+                            <m:sty m:val="p"/>
+                          </m:rPr>
+                          <a:rPr lang="en-US" i="1" smtClean="0">
+                            <a:latin typeface="Cambria Math" panose="02040503050406030204" pitchFamily="18" charset="0"/>
+                          </a:rPr>
+                          <m:t>Y</m:t>
+                        </m:r>
+                        <m:r>
+                          <a:rPr lang="en-US" i="1" smtClean="0">
+                            <a:latin typeface="Cambria Math" panose="02040503050406030204" pitchFamily="18" charset="0"/>
+                          </a:rPr>
+                          <m:t>0</m:t>
+                        </m:r>
+                      </m:sub>
+                    </m:sSub>
+                    <m:r>
+                      <a:rPr lang="en-US" i="1" smtClean="0">
+                        <a:latin typeface="Cambria Math" panose="02040503050406030204" pitchFamily="18" charset="0"/>
+                      </a:rPr>
+                      <m:t>+</m:t>
+                    </m:r>
+                    <m:sSub>
+                      <m:sSubPr>
+                        <m:ctrlPr>
+                          <a:rPr lang="en-US" i="1" smtClean="0">
+                            <a:latin typeface="Cambria Math" panose="02040503050406030204" pitchFamily="18" charset="0"/>
+                          </a:rPr>
+                        </m:ctrlPr>
+                      </m:sSubPr>
+                      <m:e>
+                        <m:r>
+                          <a:rPr lang="en-US" b="0" i="1" smtClean="0">
+                            <a:latin typeface="Cambria Math" panose="02040503050406030204" pitchFamily="18" charset="0"/>
+                          </a:rPr>
+                          <m:t> </m:t>
+                        </m:r>
+                        <m:r>
+                          <a:rPr lang="en-US" i="1" smtClean="0">
+                            <a:latin typeface="Cambria Math" panose="02040503050406030204" pitchFamily="18" charset="0"/>
+                            <a:ea typeface="Cambria Math" panose="02040503050406030204" pitchFamily="18" charset="0"/>
+                          </a:rPr>
+                          <m:t>𝛽</m:t>
+                        </m:r>
+                      </m:e>
+                      <m:sub>
+                        <m:r>
+                          <m:rPr>
+                            <m:sty m:val="p"/>
+                          </m:rPr>
+                          <a:rPr lang="en-US" i="1" smtClean="0">
+                            <a:latin typeface="Cambria Math" panose="02040503050406030204" pitchFamily="18" charset="0"/>
+                          </a:rPr>
+                          <m:t>n</m:t>
+                        </m:r>
+                      </m:sub>
+                    </m:sSub>
+                    <m:r>
+                      <m:rPr>
+                        <m:sty m:val="p"/>
+                      </m:rPr>
+                      <a:rPr lang="en-US" i="1" smtClean="0">
+                        <a:latin typeface="Cambria Math" panose="02040503050406030204" pitchFamily="18" charset="0"/>
+                      </a:rPr>
+                      <m:t>Covariates</m:t>
+                    </m:r>
+                    <m:r>
+                      <a:rPr lang="en-US" i="1" smtClean="0">
+                        <a:latin typeface="Cambria Math" panose="02040503050406030204" pitchFamily="18" charset="0"/>
+                      </a:rPr>
+                      <m:t> + </m:t>
+                    </m:r>
+                    <m:r>
+                      <a:rPr lang="en-US" i="1" smtClean="0">
+                        <a:latin typeface="Cambria Math" panose="02040503050406030204" pitchFamily="18" charset="0"/>
+                        <a:ea typeface="Cambria Math" panose="02040503050406030204" pitchFamily="18" charset="0"/>
+                      </a:rPr>
+                      <m:t>𝜀</m:t>
+                    </m:r>
+                  </m:oMath>
+                </a14:m>
+                <a:endParaRPr lang="en-US" dirty="0"/>
               </a:p>
               <a:p>
                 <a:pPr marL="0" indent="0">
+                  <a:buFont typeface="Arial" panose="020B0604020202020204" pitchFamily="34" charset="0"/>
                   <a:buNone/>
                 </a:pPr>
-                <a14:m>
-                  <m:oMathPara xmlns:m="http://schemas.openxmlformats.org/officeDocument/2006/math">
-                    <m:oMathParaPr>
-                      <m:jc m:val="centerGroup"/>
-                    </m:oMathParaPr>
-                    <m:oMath xmlns:m="http://schemas.openxmlformats.org/officeDocument/2006/math">
-                      <m:r>
-                        <a:rPr lang="en-US" sz="2400" i="1" smtClean="0">
-                          <a:latin typeface="Cambria Math" panose="02040503050406030204" pitchFamily="18" charset="0"/>
-                        </a:rPr>
-                        <m:t>𝑂𝑢𝑡𝑐𝑜𝑚</m:t>
-                      </m:r>
-                      <m:sSub>
-                        <m:sSubPr>
-                          <m:ctrlPr>
-                            <a:rPr lang="en-US" sz="2400" i="1">
-                              <a:latin typeface="Cambria Math" panose="02040503050406030204" pitchFamily="18" charset="0"/>
-                            </a:rPr>
-                          </m:ctrlPr>
-                        </m:sSubPr>
-                        <m:e>
-                          <m:r>
-                            <a:rPr lang="en-US" sz="2400" i="1">
-                              <a:latin typeface="Cambria Math" panose="02040503050406030204" pitchFamily="18" charset="0"/>
-                            </a:rPr>
-                            <m:t>𝑒</m:t>
-                          </m:r>
-                        </m:e>
-                        <m:sub>
-                          <m:r>
-                            <a:rPr lang="en-US" sz="2400" i="1">
-                              <a:latin typeface="Cambria Math" panose="02040503050406030204" pitchFamily="18" charset="0"/>
-                            </a:rPr>
-                            <m:t>𝑌</m:t>
-                          </m:r>
-                          <m:r>
-                            <a:rPr lang="en-US" sz="2400" i="1">
-                              <a:latin typeface="Cambria Math" panose="02040503050406030204" pitchFamily="18" charset="0"/>
-                            </a:rPr>
-                            <m:t>1−</m:t>
-                          </m:r>
-                          <m:r>
-                            <a:rPr lang="en-US" sz="2400" i="1">
-                              <a:latin typeface="Cambria Math" panose="02040503050406030204" pitchFamily="18" charset="0"/>
-                            </a:rPr>
-                            <m:t>𝑌</m:t>
-                          </m:r>
-                          <m:r>
-                            <a:rPr lang="en-US" sz="2400" i="1">
-                              <a:latin typeface="Cambria Math" panose="02040503050406030204" pitchFamily="18" charset="0"/>
-                            </a:rPr>
-                            <m:t>0</m:t>
-                          </m:r>
-                        </m:sub>
-                      </m:sSub>
-                      <m:r>
-                        <a:rPr lang="en-US" sz="2400" i="1">
-                          <a:latin typeface="Cambria Math" panose="02040503050406030204" pitchFamily="18" charset="0"/>
-                        </a:rPr>
-                        <m:t>=</m:t>
-                      </m:r>
-                      <m:sSub>
-                        <m:sSubPr>
-                          <m:ctrlPr>
-                            <a:rPr lang="en-US" sz="2400" i="1">
-                              <a:latin typeface="Cambria Math" panose="02040503050406030204" pitchFamily="18" charset="0"/>
-                            </a:rPr>
-                          </m:ctrlPr>
-                        </m:sSubPr>
-                        <m:e>
-                          <m:r>
-                            <a:rPr lang="en-US" sz="2400" i="1">
-                              <a:latin typeface="Cambria Math" panose="02040503050406030204" pitchFamily="18" charset="0"/>
-                            </a:rPr>
-                            <m:t>𝛽</m:t>
-                          </m:r>
-                        </m:e>
-                        <m:sub>
-                          <m:r>
-                            <a:rPr lang="en-US" sz="2400" i="1">
-                              <a:latin typeface="Cambria Math" panose="02040503050406030204" pitchFamily="18" charset="0"/>
-                            </a:rPr>
-                            <m:t>0</m:t>
-                          </m:r>
-                        </m:sub>
-                      </m:sSub>
-                      <m:r>
-                        <a:rPr lang="en-US" sz="2400" i="1">
-                          <a:latin typeface="Cambria Math" panose="02040503050406030204" pitchFamily="18" charset="0"/>
-                        </a:rPr>
-                        <m:t>+</m:t>
-                      </m:r>
-                      <m:sSub>
-                        <m:sSubPr>
-                          <m:ctrlPr>
-                            <a:rPr lang="en-US" sz="2400" i="1">
-                              <a:latin typeface="Cambria Math" panose="02040503050406030204" pitchFamily="18" charset="0"/>
-                            </a:rPr>
-                          </m:ctrlPr>
-                        </m:sSubPr>
-                        <m:e>
-                          <m:r>
-                            <a:rPr lang="en-US" sz="2400" i="1">
-                              <a:latin typeface="Cambria Math" panose="02040503050406030204" pitchFamily="18" charset="0"/>
-                            </a:rPr>
-                            <m:t>𝛽</m:t>
-                          </m:r>
-                        </m:e>
-                        <m:sub>
-                          <m:r>
-                            <a:rPr lang="en-US" sz="2400" i="1">
-                              <a:latin typeface="Cambria Math" panose="02040503050406030204" pitchFamily="18" charset="0"/>
-                            </a:rPr>
-                            <m:t>1</m:t>
-                          </m:r>
-                        </m:sub>
-                      </m:sSub>
-                      <m:r>
-                        <a:rPr lang="en-US" sz="2400" i="1">
-                          <a:latin typeface="Cambria Math" panose="02040503050406030204" pitchFamily="18" charset="0"/>
-                        </a:rPr>
-                        <m:t>𝑀𝑎𝑟𝑘𝑒</m:t>
-                      </m:r>
-                      <m:sSub>
-                        <m:sSubPr>
-                          <m:ctrlPr>
-                            <a:rPr lang="en-US" sz="2400" i="1">
-                              <a:latin typeface="Cambria Math" panose="02040503050406030204" pitchFamily="18" charset="0"/>
-                            </a:rPr>
-                          </m:ctrlPr>
-                        </m:sSubPr>
-                        <m:e>
-                          <m:r>
-                            <a:rPr lang="en-US" sz="2400" i="1">
-                              <a:latin typeface="Cambria Math" panose="02040503050406030204" pitchFamily="18" charset="0"/>
-                            </a:rPr>
-                            <m:t>𝑟</m:t>
-                          </m:r>
-                        </m:e>
-                        <m:sub>
-                          <m:r>
-                            <a:rPr lang="en-US" sz="2400" i="1">
-                              <a:latin typeface="Cambria Math" panose="02040503050406030204" pitchFamily="18" charset="0"/>
-                            </a:rPr>
-                            <m:t>𝑌</m:t>
-                          </m:r>
-                          <m:r>
-                            <a:rPr lang="en-US" sz="2400" i="1">
-                              <a:latin typeface="Cambria Math" panose="02040503050406030204" pitchFamily="18" charset="0"/>
-                            </a:rPr>
-                            <m:t>1</m:t>
-                          </m:r>
-                          <m:r>
-                            <m:rPr>
-                              <m:nor/>
-                            </m:rPr>
-                            <a:rPr lang="en-US" sz="2400" i="0">
-                              <a:latin typeface="Cambria Math" panose="02040503050406030204" pitchFamily="18" charset="0"/>
-                            </a:rPr>
-                            <m:t> </m:t>
-                          </m:r>
-                          <m:r>
-                            <m:rPr>
-                              <m:nor/>
-                            </m:rPr>
-                            <a:rPr lang="en-US" sz="2400" i="0">
-                              <a:latin typeface="Cambria Math" panose="02040503050406030204" pitchFamily="18" charset="0"/>
-                            </a:rPr>
-                            <m:t>or</m:t>
-                          </m:r>
-                          <m:r>
-                            <m:rPr>
-                              <m:nor/>
-                            </m:rPr>
-                            <a:rPr lang="en-US" sz="2400" i="0">
-                              <a:latin typeface="Cambria Math" panose="02040503050406030204" pitchFamily="18" charset="0"/>
-                            </a:rPr>
-                            <m:t> </m:t>
-                          </m:r>
-                          <m:r>
-                            <a:rPr lang="en-US" sz="2400" i="1">
-                              <a:latin typeface="Cambria Math" panose="02040503050406030204" pitchFamily="18" charset="0"/>
-                            </a:rPr>
-                            <m:t>𝑌</m:t>
-                          </m:r>
-                          <m:r>
-                            <a:rPr lang="en-US" sz="2400" i="1">
-                              <a:latin typeface="Cambria Math" panose="02040503050406030204" pitchFamily="18" charset="0"/>
-                            </a:rPr>
-                            <m:t>1−</m:t>
-                          </m:r>
-                          <m:r>
-                            <a:rPr lang="en-US" sz="2400" i="1">
-                              <a:latin typeface="Cambria Math" panose="02040503050406030204" pitchFamily="18" charset="0"/>
-                            </a:rPr>
-                            <m:t>𝑌</m:t>
-                          </m:r>
-                          <m:r>
-                            <a:rPr lang="en-US" sz="2400" i="1">
-                              <a:latin typeface="Cambria Math" panose="02040503050406030204" pitchFamily="18" charset="0"/>
-                            </a:rPr>
-                            <m:t>0</m:t>
-                          </m:r>
-                        </m:sub>
-                      </m:sSub>
-                      <m:r>
-                        <a:rPr lang="en-US" sz="2400" i="1">
-                          <a:latin typeface="Cambria Math" panose="02040503050406030204" pitchFamily="18" charset="0"/>
-                        </a:rPr>
-                        <m:t>+</m:t>
-                      </m:r>
-                      <m:sSub>
-                        <m:sSubPr>
-                          <m:ctrlPr>
-                            <a:rPr lang="en-US" sz="2400" i="1">
-                              <a:latin typeface="Cambria Math" panose="02040503050406030204" pitchFamily="18" charset="0"/>
-                            </a:rPr>
-                          </m:ctrlPr>
-                        </m:sSubPr>
-                        <m:e>
-                          <m:r>
-                            <a:rPr lang="en-US" sz="2400" i="1">
-                              <a:latin typeface="Cambria Math" panose="02040503050406030204" pitchFamily="18" charset="0"/>
-                            </a:rPr>
-                            <m:t>𝛽</m:t>
-                          </m:r>
-                        </m:e>
-                        <m:sub>
-                          <m:r>
-                            <a:rPr lang="en-US" sz="2400" i="1">
-                              <a:latin typeface="Cambria Math" panose="02040503050406030204" pitchFamily="18" charset="0"/>
-                            </a:rPr>
-                            <m:t>2</m:t>
-                          </m:r>
-                        </m:sub>
-                      </m:sSub>
-                      <m:r>
-                        <a:rPr lang="en-US" sz="2400" i="1">
-                          <a:latin typeface="Cambria Math" panose="02040503050406030204" pitchFamily="18" charset="0"/>
-                        </a:rPr>
-                        <m:t>𝐴𝑚𝑦𝑙𝑜𝑖</m:t>
-                      </m:r>
-                      <m:sSub>
-                        <m:sSubPr>
-                          <m:ctrlPr>
-                            <a:rPr lang="en-US" sz="2400" i="1">
-                              <a:latin typeface="Cambria Math" panose="02040503050406030204" pitchFamily="18" charset="0"/>
-                            </a:rPr>
-                          </m:ctrlPr>
-                        </m:sSubPr>
-                        <m:e>
-                          <m:r>
-                            <a:rPr lang="en-US" sz="2400" i="1">
-                              <a:latin typeface="Cambria Math" panose="02040503050406030204" pitchFamily="18" charset="0"/>
-                            </a:rPr>
-                            <m:t>𝑑</m:t>
-                          </m:r>
-                        </m:e>
-                        <m:sub>
-                          <m:r>
-                            <a:rPr lang="en-US" sz="2400" i="1">
-                              <a:latin typeface="Cambria Math" panose="02040503050406030204" pitchFamily="18" charset="0"/>
-                            </a:rPr>
-                            <m:t>𝑌</m:t>
-                          </m:r>
-                          <m:r>
-                            <a:rPr lang="en-US" sz="2400" i="1">
-                              <a:latin typeface="Cambria Math" panose="02040503050406030204" pitchFamily="18" charset="0"/>
-                            </a:rPr>
-                            <m:t>0</m:t>
-                          </m:r>
-                        </m:sub>
-                      </m:sSub>
-                      <m:r>
-                        <a:rPr lang="en-US" sz="2400" i="1">
-                          <a:latin typeface="Cambria Math" panose="02040503050406030204" pitchFamily="18" charset="0"/>
-                        </a:rPr>
-                        <m:t>+</m:t>
-                      </m:r>
-                      <m:sSub>
-                        <m:sSubPr>
-                          <m:ctrlPr>
-                            <a:rPr lang="en-US" sz="2400" i="1">
-                              <a:latin typeface="Cambria Math" panose="02040503050406030204" pitchFamily="18" charset="0"/>
-                            </a:rPr>
-                          </m:ctrlPr>
-                        </m:sSubPr>
-                        <m:e>
-                          <m:r>
-                            <a:rPr lang="en-US" sz="2400" i="1">
-                              <a:latin typeface="Cambria Math" panose="02040503050406030204" pitchFamily="18" charset="0"/>
-                            </a:rPr>
-                            <m:t>𝛽</m:t>
-                          </m:r>
-                        </m:e>
-                        <m:sub>
-                          <m:r>
-                            <a:rPr lang="en-US" sz="2400" i="1">
-                              <a:latin typeface="Cambria Math" panose="02040503050406030204" pitchFamily="18" charset="0"/>
-                            </a:rPr>
-                            <m:t>3</m:t>
-                          </m:r>
-                        </m:sub>
-                      </m:sSub>
-                      <m:r>
-                        <a:rPr lang="en-US" sz="2400" i="1">
-                          <a:latin typeface="Cambria Math" panose="02040503050406030204" pitchFamily="18" charset="0"/>
-                        </a:rPr>
-                        <m:t>𝑀𝑎𝑟𝑘𝑒</m:t>
-                      </m:r>
-                      <m:sSub>
-                        <m:sSubPr>
-                          <m:ctrlPr>
-                            <a:rPr lang="en-US" sz="2400" i="1">
-                              <a:latin typeface="Cambria Math" panose="02040503050406030204" pitchFamily="18" charset="0"/>
-                            </a:rPr>
-                          </m:ctrlPr>
-                        </m:sSubPr>
-                        <m:e>
-                          <m:r>
-                            <a:rPr lang="en-US" sz="2400" i="1">
-                              <a:latin typeface="Cambria Math" panose="02040503050406030204" pitchFamily="18" charset="0"/>
-                            </a:rPr>
-                            <m:t>𝑟</m:t>
-                          </m:r>
-                        </m:e>
-                        <m:sub>
-                          <m:r>
-                            <a:rPr lang="en-US" sz="2400" i="1">
-                              <a:latin typeface="Cambria Math" panose="02040503050406030204" pitchFamily="18" charset="0"/>
-                            </a:rPr>
-                            <m:t>𝑌</m:t>
-                          </m:r>
-                          <m:r>
-                            <a:rPr lang="en-US" sz="2400" i="1">
-                              <a:latin typeface="Cambria Math" panose="02040503050406030204" pitchFamily="18" charset="0"/>
-                            </a:rPr>
-                            <m:t>1</m:t>
-                          </m:r>
-                          <m:r>
-                            <m:rPr>
-                              <m:nor/>
-                            </m:rPr>
-                            <a:rPr lang="en-US" sz="2400" i="0">
-                              <a:latin typeface="Cambria Math" panose="02040503050406030204" pitchFamily="18" charset="0"/>
-                            </a:rPr>
-                            <m:t> </m:t>
-                          </m:r>
-                          <m:r>
-                            <m:rPr>
-                              <m:nor/>
-                            </m:rPr>
-                            <a:rPr lang="en-US" sz="2400" i="0">
-                              <a:latin typeface="Cambria Math" panose="02040503050406030204" pitchFamily="18" charset="0"/>
-                            </a:rPr>
-                            <m:t>or</m:t>
-                          </m:r>
-                          <m:r>
-                            <m:rPr>
-                              <m:nor/>
-                            </m:rPr>
-                            <a:rPr lang="en-US" sz="2400" i="0">
-                              <a:latin typeface="Cambria Math" panose="02040503050406030204" pitchFamily="18" charset="0"/>
-                            </a:rPr>
-                            <m:t> </m:t>
-                          </m:r>
-                          <m:r>
-                            <a:rPr lang="en-US" sz="2400" i="1">
-                              <a:latin typeface="Cambria Math" panose="02040503050406030204" pitchFamily="18" charset="0"/>
-                            </a:rPr>
-                            <m:t>𝑌</m:t>
-                          </m:r>
-                          <m:r>
-                            <a:rPr lang="en-US" sz="2400" i="1">
-                              <a:latin typeface="Cambria Math" panose="02040503050406030204" pitchFamily="18" charset="0"/>
-                            </a:rPr>
-                            <m:t>1−</m:t>
-                          </m:r>
-                          <m:r>
-                            <a:rPr lang="en-US" sz="2400" i="1">
-                              <a:latin typeface="Cambria Math" panose="02040503050406030204" pitchFamily="18" charset="0"/>
-                            </a:rPr>
-                            <m:t>𝑌</m:t>
-                          </m:r>
-                          <m:r>
-                            <a:rPr lang="en-US" sz="2400" i="1">
-                              <a:latin typeface="Cambria Math" panose="02040503050406030204" pitchFamily="18" charset="0"/>
-                            </a:rPr>
-                            <m:t>0</m:t>
-                          </m:r>
-                        </m:sub>
-                      </m:sSub>
-                      <m:r>
-                        <a:rPr lang="en-US" sz="2400" i="1">
-                          <a:latin typeface="Cambria Math" panose="02040503050406030204" pitchFamily="18" charset="0"/>
-                        </a:rPr>
-                        <m:t>∗</m:t>
-                      </m:r>
-                      <m:r>
-                        <a:rPr lang="en-US" sz="2400" i="1">
-                          <a:latin typeface="Cambria Math" panose="02040503050406030204" pitchFamily="18" charset="0"/>
-                        </a:rPr>
-                        <m:t>𝐴𝑚𝑦𝑙𝑜𝑖</m:t>
-                      </m:r>
-                      <m:sSub>
-                        <m:sSubPr>
-                          <m:ctrlPr>
-                            <a:rPr lang="en-US" sz="2400" i="1">
-                              <a:latin typeface="Cambria Math" panose="02040503050406030204" pitchFamily="18" charset="0"/>
-                            </a:rPr>
-                          </m:ctrlPr>
-                        </m:sSubPr>
-                        <m:e>
-                          <m:r>
-                            <a:rPr lang="en-US" sz="2400" i="1">
-                              <a:latin typeface="Cambria Math" panose="02040503050406030204" pitchFamily="18" charset="0"/>
-                            </a:rPr>
-                            <m:t>𝑑</m:t>
-                          </m:r>
-                        </m:e>
-                        <m:sub>
-                          <m:r>
-                            <a:rPr lang="en-US" sz="2400" i="1">
-                              <a:latin typeface="Cambria Math" panose="02040503050406030204" pitchFamily="18" charset="0"/>
-                            </a:rPr>
-                            <m:t>𝑌</m:t>
-                          </m:r>
-                          <m:r>
-                            <a:rPr lang="en-US" sz="2400" i="1">
-                              <a:latin typeface="Cambria Math" panose="02040503050406030204" pitchFamily="18" charset="0"/>
-                            </a:rPr>
-                            <m:t>0</m:t>
-                          </m:r>
-                        </m:sub>
-                      </m:sSub>
-                      <m:r>
-                        <a:rPr lang="en-US" sz="2400" i="1">
-                          <a:latin typeface="Cambria Math" panose="02040503050406030204" pitchFamily="18" charset="0"/>
-                        </a:rPr>
-                        <m:t>+</m:t>
-                      </m:r>
-                      <m:sSub>
-                        <m:sSubPr>
-                          <m:ctrlPr>
-                            <a:rPr lang="en-US" sz="2400" i="1">
-                              <a:latin typeface="Cambria Math" panose="02040503050406030204" pitchFamily="18" charset="0"/>
-                            </a:rPr>
-                          </m:ctrlPr>
-                        </m:sSubPr>
-                        <m:e>
-                          <m:r>
-                            <a:rPr lang="en-US" sz="2400" i="1">
-                              <a:latin typeface="Cambria Math" panose="02040503050406030204" pitchFamily="18" charset="0"/>
-                            </a:rPr>
-                            <m:t>𝛽</m:t>
-                          </m:r>
-                        </m:e>
-                        <m:sub>
-                          <m:r>
-                            <a:rPr lang="en-US" sz="2400" i="1">
-                              <a:latin typeface="Cambria Math" panose="02040503050406030204" pitchFamily="18" charset="0"/>
-                            </a:rPr>
-                            <m:t>4</m:t>
-                          </m:r>
-                        </m:sub>
-                      </m:sSub>
-                      <m:r>
-                        <a:rPr lang="en-US" sz="2400" i="1">
-                          <a:latin typeface="Cambria Math" panose="02040503050406030204" pitchFamily="18" charset="0"/>
-                        </a:rPr>
-                        <m:t>𝑂𝑢𝑡𝑐𝑜𝑚</m:t>
-                      </m:r>
-                      <m:sSub>
-                        <m:sSubPr>
-                          <m:ctrlPr>
-                            <a:rPr lang="en-US" sz="2400" i="1">
-                              <a:latin typeface="Cambria Math" panose="02040503050406030204" pitchFamily="18" charset="0"/>
-                            </a:rPr>
-                          </m:ctrlPr>
-                        </m:sSubPr>
-                        <m:e>
-                          <m:r>
-                            <a:rPr lang="en-US" sz="2400" i="1">
-                              <a:latin typeface="Cambria Math" panose="02040503050406030204" pitchFamily="18" charset="0"/>
-                            </a:rPr>
-                            <m:t>𝑒</m:t>
-                          </m:r>
-                        </m:e>
-                        <m:sub>
-                          <m:r>
-                            <a:rPr lang="en-US" sz="2400" i="1">
-                              <a:latin typeface="Cambria Math" panose="02040503050406030204" pitchFamily="18" charset="0"/>
-                            </a:rPr>
-                            <m:t>𝑌</m:t>
-                          </m:r>
-                          <m:r>
-                            <a:rPr lang="en-US" sz="2400" i="1">
-                              <a:latin typeface="Cambria Math" panose="02040503050406030204" pitchFamily="18" charset="0"/>
-                            </a:rPr>
-                            <m:t>0</m:t>
-                          </m:r>
-                        </m:sub>
-                      </m:sSub>
-                      <m:r>
-                        <a:rPr lang="en-US" sz="2400" i="1">
-                          <a:latin typeface="Cambria Math" panose="02040503050406030204" pitchFamily="18" charset="0"/>
-                        </a:rPr>
-                        <m:t>+</m:t>
-                      </m:r>
-                      <m:sSub>
-                        <m:sSubPr>
-                          <m:ctrlPr>
-                            <a:rPr lang="en-US" sz="2400" i="1">
-                              <a:latin typeface="Cambria Math" panose="02040503050406030204" pitchFamily="18" charset="0"/>
-                            </a:rPr>
-                          </m:ctrlPr>
-                        </m:sSubPr>
-                        <m:e>
-                          <m:r>
-                            <a:rPr lang="en-US" sz="2400" i="1">
-                              <a:latin typeface="Cambria Math" panose="02040503050406030204" pitchFamily="18" charset="0"/>
-                            </a:rPr>
-                            <m:t>𝛽</m:t>
-                          </m:r>
-                        </m:e>
-                        <m:sub>
-                          <m:r>
-                            <a:rPr lang="en-US" sz="2400" i="1">
-                              <a:latin typeface="Cambria Math" panose="02040503050406030204" pitchFamily="18" charset="0"/>
-                            </a:rPr>
-                            <m:t>𝑛</m:t>
-                          </m:r>
-                        </m:sub>
-                      </m:sSub>
-                      <m:r>
-                        <a:rPr lang="en-US" sz="2400" i="1">
-                          <a:latin typeface="Cambria Math" panose="02040503050406030204" pitchFamily="18" charset="0"/>
-                        </a:rPr>
-                        <m:t>𝐶𝑜𝑣𝑎𝑟𝑖𝑎𝑡𝑒𝑠</m:t>
-                      </m:r>
-                      <m:r>
-                        <a:rPr lang="en-US" sz="2400" i="1">
-                          <a:latin typeface="Cambria Math" panose="02040503050406030204" pitchFamily="18" charset="0"/>
-                        </a:rPr>
-                        <m:t>+</m:t>
-                      </m:r>
-                      <m:r>
-                        <a:rPr lang="en-US" sz="2400" i="1">
-                          <a:latin typeface="Cambria Math" panose="02040503050406030204" pitchFamily="18" charset="0"/>
-                        </a:rPr>
-                        <m:t>𝜖</m:t>
-                      </m:r>
-                      <m:r>
-                        <a:rPr lang="en-US" sz="2400" i="1">
-                          <a:latin typeface="Cambria Math" panose="02040503050406030204" pitchFamily="18" charset="0"/>
-                        </a:rPr>
-                        <m:t>���</m:t>
-                      </m:r>
-                    </m:oMath>
-                  </m:oMathPara>
-                </a14:m>
-                <a:endParaRPr lang="en-US" sz="2400" dirty="0"/>
+                <a:endParaRPr lang="en-US" dirty="0"/>
+              </a:p>
+              <a:p>
+                <a:pPr marL="0" indent="0">
+                  <a:buFont typeface="Arial" panose="020B0604020202020204" pitchFamily="34" charset="0"/>
+                  <a:buNone/>
+                </a:pPr>
+                <a:endParaRPr lang="en-US" dirty="0"/>
               </a:p>
             </p:txBody>
           </p:sp>
@@ -6149,10 +5619,10 @@
         <mc:Fallback>
           <p:sp>
             <p:nvSpPr>
-              <p:cNvPr id="12" name="Content Placeholder 4">
+              <p:cNvPr id="4" name="Content Placeholder 2">
                 <a:extLst>
                   <a:ext uri="{FF2B5EF4-FFF2-40B4-BE49-F238E27FC236}">
-                    <a16:creationId xmlns:a16="http://schemas.microsoft.com/office/drawing/2014/main" id="{C7FB2D84-EFBF-6B49-4764-34644694BC48}"/>
+                    <a16:creationId xmlns:a16="http://schemas.microsoft.com/office/drawing/2014/main" id="{1AC1B729-0183-05D0-28CD-089B160F76B1}"/>
                   </a:ext>
                 </a:extLst>
               </p:cNvPr>
@@ -6163,16 +5633,16 @@
             </p:nvSpPr>
             <p:spPr>
               <a:xfrm>
-                <a:off x="6269738" y="1690687"/>
-                <a:ext cx="5084064" cy="2392807"/>
+                <a:off x="5848141" y="1690688"/>
+                <a:ext cx="5505659" cy="2740635"/>
               </a:xfrm>
               <a:prstGeom prst="rect">
                 <a:avLst/>
               </a:prstGeom>
               <a:blipFill>
-                <a:blip r:embed="rId4"/>
+                <a:blip r:embed="rId3"/>
                 <a:stretch>
-                  <a:fillRect l="-2518" t="-4326"/>
+                  <a:fillRect l="-1991" t="-3333"/>
                 </a:stretch>
               </a:blipFill>
             </p:spPr>
@@ -6193,84 +5663,226 @@
       </mc:AlternateContent>
       <p:sp>
         <p:nvSpPr>
-          <p:cNvPr id="16" name="TextBox 15">
-            <a:extLst>
-              <a:ext uri="{FF2B5EF4-FFF2-40B4-BE49-F238E27FC236}">
-                <a16:creationId xmlns:a16="http://schemas.microsoft.com/office/drawing/2014/main" id="{8F15DD56-E0FF-A28F-198B-39C6256AA827}"/>
-              </a:ext>
-            </a:extLst>
-          </p:cNvPr>
-          <p:cNvSpPr txBox="1"/>
+          <p:cNvPr id="5" name="Content Placeholder 2">
+            <a:extLst>
+              <a:ext uri="{FF2B5EF4-FFF2-40B4-BE49-F238E27FC236}">
+                <a16:creationId xmlns:a16="http://schemas.microsoft.com/office/drawing/2014/main" id="{C9C8DACF-29B2-06A6-F49C-071FE633DEAE}"/>
+              </a:ext>
+            </a:extLst>
+          </p:cNvPr>
+          <p:cNvSpPr txBox="1">
+            <a:spLocks/>
+          </p:cNvSpPr>
           <p:nvPr/>
         </p:nvSpPr>
         <p:spPr>
           <a:xfrm>
-            <a:off x="1011938" y="4083494"/>
-            <a:ext cx="10515600" cy="2308324"/>
+            <a:off x="838200" y="4059533"/>
+            <a:ext cx="10515600" cy="2582427"/>
           </a:xfrm>
           <a:prstGeom prst="rect">
             <a:avLst/>
           </a:prstGeom>
-          <a:noFill/>
         </p:spPr>
         <p:txBody>
-          <a:bodyPr wrap="square">
-            <a:spAutoFit/>
+          <a:bodyPr vert="horz" lIns="91440" tIns="45720" rIns="91440" bIns="45720" rtlCol="0">
+            <a:normAutofit fontScale="92500"/>
           </a:bodyPr>
-          <a:lstStyle/>
-          <a:p>
-            <a:pPr marL="285750" indent="-285750">
+          <a:lstStyle>
+            <a:lvl1pPr marL="228600" indent="-228600" algn="l" defTabSz="914400" rtl="0" eaLnBrk="1" latinLnBrk="0" hangingPunct="1">
+              <a:lnSpc>
+                <a:spcPct val="90000"/>
+              </a:lnSpc>
+              <a:spcBef>
+                <a:spcPts val="1000"/>
+              </a:spcBef>
               <a:buFont typeface="Arial" panose="020B0604020202020204" pitchFamily="34" charset="0"/>
               <a:buChar char="•"/>
-            </a:pPr>
-            <a:r>
-              <a:rPr lang="en-US" sz="2400" dirty="0"/>
-              <a:t>Analyze each inflammatory marker and each outcome in a separate model</a:t>
-            </a:r>
-          </a:p>
-          <a:p>
-            <a:pPr marL="742950" lvl="1" indent="-285750">
+              <a:defRPr sz="2800" kern="1200">
+                <a:solidFill>
+                  <a:schemeClr val="tx1"/>
+                </a:solidFill>
+                <a:latin typeface="+mn-lt"/>
+                <a:ea typeface="+mn-ea"/>
+                <a:cs typeface="+mn-cs"/>
+              </a:defRPr>
+            </a:lvl1pPr>
+            <a:lvl2pPr marL="685800" indent="-228600" algn="l" defTabSz="914400" rtl="0" eaLnBrk="1" latinLnBrk="0" hangingPunct="1">
+              <a:lnSpc>
+                <a:spcPct val="90000"/>
+              </a:lnSpc>
+              <a:spcBef>
+                <a:spcPts val="500"/>
+              </a:spcBef>
               <a:buFont typeface="Arial" panose="020B0604020202020204" pitchFamily="34" charset="0"/>
               <a:buChar char="•"/>
-            </a:pPr>
-            <a:r>
-              <a:rPr lang="en-US" sz="2400" dirty="0"/>
-              <a:t>Control type I error with 3 preliminary approaches: 0.05/4, 0.05/6, 0.05/24</a:t>
-            </a:r>
-          </a:p>
-          <a:p>
-            <a:pPr marL="285750" indent="-285750">
+              <a:defRPr sz="2400" kern="1200">
+                <a:solidFill>
+                  <a:schemeClr val="tx1"/>
+                </a:solidFill>
+                <a:latin typeface="+mn-lt"/>
+                <a:ea typeface="+mn-ea"/>
+                <a:cs typeface="+mn-cs"/>
+              </a:defRPr>
+            </a:lvl2pPr>
+            <a:lvl3pPr marL="1143000" indent="-228600" algn="l" defTabSz="914400" rtl="0" eaLnBrk="1" latinLnBrk="0" hangingPunct="1">
+              <a:lnSpc>
+                <a:spcPct val="90000"/>
+              </a:lnSpc>
+              <a:spcBef>
+                <a:spcPts val="500"/>
+              </a:spcBef>
               <a:buFont typeface="Arial" panose="020B0604020202020204" pitchFamily="34" charset="0"/>
               <a:buChar char="•"/>
-            </a:pPr>
-            <a:r>
-              <a:rPr lang="en-US" sz="2400" dirty="0"/>
-              <a:t>Covariates: age, sex, APOE status, baseline outcome</a:t>
-            </a:r>
-          </a:p>
-          <a:p>
-            <a:pPr marL="742950" lvl="1" indent="-285750">
+              <a:defRPr sz="2000" kern="1200">
+                <a:solidFill>
+                  <a:schemeClr val="tx1"/>
+                </a:solidFill>
+                <a:latin typeface="+mn-lt"/>
+                <a:ea typeface="+mn-ea"/>
+                <a:cs typeface="+mn-cs"/>
+              </a:defRPr>
+            </a:lvl3pPr>
+            <a:lvl4pPr marL="1600200" indent="-228600" algn="l" defTabSz="914400" rtl="0" eaLnBrk="1" latinLnBrk="0" hangingPunct="1">
+              <a:lnSpc>
+                <a:spcPct val="90000"/>
+              </a:lnSpc>
+              <a:spcBef>
+                <a:spcPts val="500"/>
+              </a:spcBef>
               <a:buFont typeface="Arial" panose="020B0604020202020204" pitchFamily="34" charset="0"/>
               <a:buChar char="•"/>
-            </a:pPr>
-            <a:r>
-              <a:rPr lang="en-US" sz="2400" dirty="0"/>
-              <a:t>Add precision variables after exploratory investigation</a:t>
-            </a:r>
-          </a:p>
-          <a:p>
-            <a:pPr marL="742950" lvl="1" indent="-285750">
+              <a:defRPr sz="1800" kern="1200">
+                <a:solidFill>
+                  <a:schemeClr val="tx1"/>
+                </a:solidFill>
+                <a:latin typeface="+mn-lt"/>
+                <a:ea typeface="+mn-ea"/>
+                <a:cs typeface="+mn-cs"/>
+              </a:defRPr>
+            </a:lvl4pPr>
+            <a:lvl5pPr marL="2057400" indent="-228600" algn="l" defTabSz="914400" rtl="0" eaLnBrk="1" latinLnBrk="0" hangingPunct="1">
+              <a:lnSpc>
+                <a:spcPct val="90000"/>
+              </a:lnSpc>
+              <a:spcBef>
+                <a:spcPts val="500"/>
+              </a:spcBef>
               <a:buFont typeface="Arial" panose="020B0604020202020204" pitchFamily="34" charset="0"/>
               <a:buChar char="•"/>
-            </a:pPr>
-            <a:endParaRPr lang="en-US" sz="2400" dirty="0"/>
+              <a:defRPr sz="1800" kern="1200">
+                <a:solidFill>
+                  <a:schemeClr val="tx1"/>
+                </a:solidFill>
+                <a:latin typeface="+mn-lt"/>
+                <a:ea typeface="+mn-ea"/>
+                <a:cs typeface="+mn-cs"/>
+              </a:defRPr>
+            </a:lvl5pPr>
+            <a:lvl6pPr marL="2514600" indent="-228600" algn="l" defTabSz="914400" rtl="0" eaLnBrk="1" latinLnBrk="0" hangingPunct="1">
+              <a:lnSpc>
+                <a:spcPct val="90000"/>
+              </a:lnSpc>
+              <a:spcBef>
+                <a:spcPts val="500"/>
+              </a:spcBef>
+              <a:buFont typeface="Arial" panose="020B0604020202020204" pitchFamily="34" charset="0"/>
+              <a:buChar char="•"/>
+              <a:defRPr sz="1800" kern="1200">
+                <a:solidFill>
+                  <a:schemeClr val="tx1"/>
+                </a:solidFill>
+                <a:latin typeface="+mn-lt"/>
+                <a:ea typeface="+mn-ea"/>
+                <a:cs typeface="+mn-cs"/>
+              </a:defRPr>
+            </a:lvl6pPr>
+            <a:lvl7pPr marL="2971800" indent="-228600" algn="l" defTabSz="914400" rtl="0" eaLnBrk="1" latinLnBrk="0" hangingPunct="1">
+              <a:lnSpc>
+                <a:spcPct val="90000"/>
+              </a:lnSpc>
+              <a:spcBef>
+                <a:spcPts val="500"/>
+              </a:spcBef>
+              <a:buFont typeface="Arial" panose="020B0604020202020204" pitchFamily="34" charset="0"/>
+              <a:buChar char="•"/>
+              <a:defRPr sz="1800" kern="1200">
+                <a:solidFill>
+                  <a:schemeClr val="tx1"/>
+                </a:solidFill>
+                <a:latin typeface="+mn-lt"/>
+                <a:ea typeface="+mn-ea"/>
+                <a:cs typeface="+mn-cs"/>
+              </a:defRPr>
+            </a:lvl7pPr>
+            <a:lvl8pPr marL="3429000" indent="-228600" algn="l" defTabSz="914400" rtl="0" eaLnBrk="1" latinLnBrk="0" hangingPunct="1">
+              <a:lnSpc>
+                <a:spcPct val="90000"/>
+              </a:lnSpc>
+              <a:spcBef>
+                <a:spcPts val="500"/>
+              </a:spcBef>
+              <a:buFont typeface="Arial" panose="020B0604020202020204" pitchFamily="34" charset="0"/>
+              <a:buChar char="•"/>
+              <a:defRPr sz="1800" kern="1200">
+                <a:solidFill>
+                  <a:schemeClr val="tx1"/>
+                </a:solidFill>
+                <a:latin typeface="+mn-lt"/>
+                <a:ea typeface="+mn-ea"/>
+                <a:cs typeface="+mn-cs"/>
+              </a:defRPr>
+            </a:lvl8pPr>
+            <a:lvl9pPr marL="3886200" indent="-228600" algn="l" defTabSz="914400" rtl="0" eaLnBrk="1" latinLnBrk="0" hangingPunct="1">
+              <a:lnSpc>
+                <a:spcPct val="90000"/>
+              </a:lnSpc>
+              <a:spcBef>
+                <a:spcPts val="500"/>
+              </a:spcBef>
+              <a:buFont typeface="Arial" panose="020B0604020202020204" pitchFamily="34" charset="0"/>
+              <a:buChar char="•"/>
+              <a:defRPr sz="1800" kern="1200">
+                <a:solidFill>
+                  <a:schemeClr val="tx1"/>
+                </a:solidFill>
+                <a:latin typeface="+mn-lt"/>
+                <a:ea typeface="+mn-ea"/>
+                <a:cs typeface="+mn-cs"/>
+              </a:defRPr>
+            </a:lvl9pPr>
+          </a:lstStyle>
+          <a:p>
+            <a:r>
+              <a:rPr lang="en-US" dirty="0"/>
+              <a:t>Covariates will be evaluated as precision variables in an exploratory manner</a:t>
+            </a:r>
+          </a:p>
+          <a:p>
+            <a:r>
+              <a:rPr lang="en-US" dirty="0"/>
+              <a:t>Missing data will be investigated for bias </a:t>
+            </a:r>
+          </a:p>
+          <a:p>
+            <a:r>
+              <a:rPr lang="en-US" dirty="0"/>
+              <a:t>Type I Error will be controlled as 0.05/4 (markers), 0.05/6 (outcomes), or 0.05/24</a:t>
+            </a:r>
+          </a:p>
+          <a:p>
+            <a:pPr lvl="1"/>
+            <a:r>
+              <a:rPr lang="en-US" dirty="0"/>
+              <a:t>More formal adjustments will be explored once empirical correlations are known</a:t>
+            </a:r>
           </a:p>
         </p:txBody>
       </p:sp>
     </p:spTree>
     <p:extLst>
       <p:ext uri="{BB962C8B-B14F-4D97-AF65-F5344CB8AC3E}">
-        <p14:creationId xmlns:p14="http://schemas.microsoft.com/office/powerpoint/2010/main" val="387199353"/>
+        <p14:creationId xmlns:p14="http://schemas.microsoft.com/office/powerpoint/2010/main" val="888993954"/>
       </p:ext>
     </p:extLst>
   </p:cSld>

--- a/P2/Dissemination/P2_Presentation.pptx
+++ b/P2/Dissemination/P2_Presentation.pptx
@@ -134,7 +134,7 @@
   <pc:docChgLst>
     <pc:chgData name="Ezra Weible" userId="67bcaf2f89c4552e" providerId="LiveId" clId="{E4E19776-AA89-4579-B0CB-50FEF10C4E93}"/>
     <pc:docChg chg="undo custSel addSld delSld modSld">
-      <pc:chgData name="Ezra Weible" userId="67bcaf2f89c4552e" providerId="LiveId" clId="{E4E19776-AA89-4579-B0CB-50FEF10C4E93}" dt="2026-03-30T15:13:51.918" v="815" actId="20577"/>
+      <pc:chgData name="Ezra Weible" userId="67bcaf2f89c4552e" providerId="LiveId" clId="{E4E19776-AA89-4579-B0CB-50FEF10C4E93}" dt="2026-03-30T15:33:46.774" v="866" actId="20577"/>
       <pc:docMkLst>
         <pc:docMk/>
       </pc:docMkLst>
@@ -161,7 +161,7 @@
         </pc:spChg>
       </pc:sldChg>
       <pc:sldChg chg="addSp modSp new mod">
-        <pc:chgData name="Ezra Weible" userId="67bcaf2f89c4552e" providerId="LiveId" clId="{E4E19776-AA89-4579-B0CB-50FEF10C4E93}" dt="2026-03-30T15:13:51.918" v="815" actId="20577"/>
+        <pc:chgData name="Ezra Weible" userId="67bcaf2f89c4552e" providerId="LiveId" clId="{E4E19776-AA89-4579-B0CB-50FEF10C4E93}" dt="2026-03-30T15:33:46.774" v="866" actId="20577"/>
         <pc:sldMkLst>
           <pc:docMk/>
           <pc:sldMk cId="888993954" sldId="268"/>
@@ -191,7 +191,7 @@
           </ac:spMkLst>
         </pc:spChg>
         <pc:spChg chg="add mod">
-          <ac:chgData name="Ezra Weible" userId="67bcaf2f89c4552e" providerId="LiveId" clId="{E4E19776-AA89-4579-B0CB-50FEF10C4E93}" dt="2026-03-30T15:13:51.918" v="815" actId="20577"/>
+          <ac:chgData name="Ezra Weible" userId="67bcaf2f89c4552e" providerId="LiveId" clId="{E4E19776-AA89-4579-B0CB-50FEF10C4E93}" dt="2026-03-30T15:33:46.774" v="866" actId="20577"/>
           <ac:spMkLst>
             <pc:docMk/>
             <pc:sldMk cId="888993954" sldId="268"/>
@@ -4323,8 +4323,8 @@
           </a:p>
         </p:txBody>
       </p:sp>
-      <mc:AlternateContent xmlns:mc="http://schemas.openxmlformats.org/markup-compatibility/2006">
-        <mc:Choice xmlns:a14="http://schemas.microsoft.com/office/drawing/2010/main" Requires="a14">
+      <mc:AlternateContent xmlns:mc="http://schemas.openxmlformats.org/markup-compatibility/2006" xmlns:a14="http://schemas.microsoft.com/office/drawing/2010/main">
+        <mc:Choice Requires="a14">
           <p:sp>
             <p:nvSpPr>
               <p:cNvPr id="3" name="Content Placeholder 2">
@@ -4440,7 +4440,7 @@
                           <a:rPr lang="en-US" b="0" i="1" smtClean="0">
                             <a:latin typeface="Cambria Math" panose="02040503050406030204" pitchFamily="18" charset="0"/>
                           </a:rPr>
-                          <m:t>1-</m:t>
+                          <m:t>1−</m:t>
                         </m:r>
                         <m:r>
                           <m:rPr>
@@ -4586,7 +4586,7 @@
                           <a:rPr lang="en-US" b="0" i="1" smtClean="0">
                             <a:latin typeface="Cambria Math" panose="02040503050406030204" pitchFamily="18" charset="0"/>
                           </a:rPr>
-                          <m:t>1 - </m:t>
+                          <m:t>1 − </m:t>
                         </m:r>
                         <m:r>
                           <m:rPr>
@@ -4750,7 +4750,7 @@
             </p:txBody>
           </p:sp>
         </mc:Choice>
-        <mc:Fallback>
+        <mc:Fallback xmlns="">
           <p:sp>
             <p:nvSpPr>
               <p:cNvPr id="3" name="Content Placeholder 2">
@@ -4794,8 +4794,8 @@
           </p:sp>
         </mc:Fallback>
       </mc:AlternateContent>
-      <mc:AlternateContent xmlns:mc="http://schemas.openxmlformats.org/markup-compatibility/2006">
-        <mc:Choice xmlns:a14="http://schemas.microsoft.com/office/drawing/2010/main" Requires="a14">
+      <mc:AlternateContent xmlns:mc="http://schemas.openxmlformats.org/markup-compatibility/2006" xmlns:a14="http://schemas.microsoft.com/office/drawing/2010/main">
+        <mc:Choice Requires="a14">
           <p:sp>
             <p:nvSpPr>
               <p:cNvPr id="4" name="Content Placeholder 2">
@@ -5071,7 +5071,7 @@
                           <a:rPr lang="en-US" i="1" smtClean="0">
                             <a:latin typeface="Cambria Math" panose="02040503050406030204" pitchFamily="18" charset="0"/>
                           </a:rPr>
-                          <m:t>1-</m:t>
+                          <m:t>1−</m:t>
                         </m:r>
                         <m:r>
                           <m:rPr>
@@ -5217,7 +5217,7 @@
                           <a:rPr lang="en-US" i="1" smtClean="0">
                             <a:latin typeface="Cambria Math" panose="02040503050406030204" pitchFamily="18" charset="0"/>
                           </a:rPr>
-                          <m:t>1 - </m:t>
+                          <m:t>1 − </m:t>
                         </m:r>
                         <m:r>
                           <m:rPr>
@@ -5424,7 +5424,7 @@
                       <a:rPr lang="en-US" b="0" i="1" smtClean="0">
                         <a:latin typeface="Cambria Math" panose="02040503050406030204" pitchFamily="18" charset="0"/>
                       </a:rPr>
-                      <m:t>*</m:t>
+                      <m:t>∗</m:t>
                     </m:r>
                     <m:sSub>
                       <m:sSubPr>
@@ -5616,7 +5616,7 @@
             </p:txBody>
           </p:sp>
         </mc:Choice>
-        <mc:Fallback>
+        <mc:Fallback xmlns="">
           <p:sp>
             <p:nvSpPr>
               <p:cNvPr id="4" name="Content Placeholder 2">
@@ -5686,7 +5686,7 @@
         </p:spPr>
         <p:txBody>
           <a:bodyPr vert="horz" lIns="91440" tIns="45720" rIns="91440" bIns="45720" rtlCol="0">
-            <a:normAutofit fontScale="92500"/>
+            <a:normAutofit fontScale="92500" lnSpcReduction="20000"/>
           </a:bodyPr>
           <a:lstStyle>
             <a:lvl1pPr marL="228600" indent="-228600" algn="l" defTabSz="914400" rtl="0" eaLnBrk="1" latinLnBrk="0" hangingPunct="1">
@@ -5857,6 +5857,18 @@
               <a:rPr lang="en-US" dirty="0"/>
               <a:t>Covariates will be evaluated as precision variables in an exploratory manner</a:t>
             </a:r>
+          </a:p>
+          <a:p>
+            <a:pPr lvl="1"/>
+            <a:r>
+              <a:rPr lang="en-US" dirty="0"/>
+              <a:t>Age, sex, APOE status added </a:t>
+            </a:r>
+            <a:r>
+              <a:rPr lang="en-US" i="1" dirty="0"/>
+              <a:t>a priori</a:t>
+            </a:r>
+            <a:endParaRPr lang="en-US" dirty="0"/>
           </a:p>
           <a:p>
             <a:r>
